--- a/slides/pptx/week15.pptx
+++ b/slides/pptx/week15.pptx
@@ -2103,7 +2103,7 @@
     <p:bg>
       <p:bgPr>
         <a:solidFill>
-          <a:srgbClr val="0E1726"/>
+          <a:srgbClr val="FFFFFF"/>
         </a:solidFill>
       </p:bgPr>
     </p:bg>
@@ -2121,38 +2121,9 @@
           <a:chExt cx="0" cy="0"/>
         </a:xfrm>
       </p:grpSpPr>
-      <p:sp>
-        <p:nvSpPr>
-          <p:cNvPr id="2" name="Shape 0"/>
-          <p:cNvSpPr/>
-          <p:nvPr/>
-        </p:nvSpPr>
-        <p:spPr>
-          <a:xfrm>
-            <a:off x="603504" y="411480"/>
-            <a:ext cx="1874520" cy="932688"/>
-          </a:xfrm>
-          <a:prstGeom prst="roundRect">
-            <a:avLst>
-              <a:gd name="adj" fmla="val 7843"/>
-            </a:avLst>
-          </a:prstGeom>
-          <a:solidFill>
-            <a:srgbClr val="FFFFFF"/>
-          </a:solidFill>
-          <a:ln/>
-          <a:effectLst>
-            <a:outerShdw sx="100000" sy="100000" kx="0" ky="0" algn="bl" rotWithShape="0" blurRad="101600" dist="38100" dir="5400000">
-              <a:srgbClr val="000000">
-                <a:alpha val="35000"/>
-              </a:srgbClr>
-            </a:outerShdw>
-          </a:effectLst>
-        </p:spPr>
-      </p:sp>
       <p:pic>
         <p:nvPicPr>
-          <p:cNvPr id="3" name="Image 0" descr="/Users/pop7/Library/CloudStorage/OneDrive-MonsterConnectCo.,Ltd/Lecture/KOSEN69 - software-security/slides/pptx/assets/logo-small.png">    </p:cNvPr>
+          <p:cNvPr id="2" name="Image 0" descr="/Users/pop7/Library/CloudStorage/OneDrive-MonsterConnectCo.,Ltd/Lecture/KOSEN69 - software-security/slides/pptx/assets/logo-small.png">    </p:cNvPr>
           <p:cNvPicPr>
             <a:picLocks noChangeAspect="1"/>
           </p:cNvPicPr>
@@ -2166,8 +2137,8 @@
         </p:blipFill>
         <p:spPr>
           <a:xfrm>
-            <a:off x="758952" y="566928"/>
-            <a:ext cx="1563624" cy="621792"/>
+            <a:off x="640080" y="502920"/>
+            <a:ext cx="1691640" cy="676656"/>
           </a:xfrm>
           <a:prstGeom prst="rect">
             <a:avLst/>
@@ -2176,7 +2147,7 @@
       </p:pic>
       <p:sp>
         <p:nvSpPr>
-          <p:cNvPr id="4" name="Text 1"/>
+          <p:cNvPr id="3" name="Text 0"/>
           <p:cNvSpPr/>
           <p:nvPr/>
         </p:nvSpPr>
@@ -2215,7 +2186,7 @@
       </p:sp>
       <p:sp>
         <p:nvSpPr>
-          <p:cNvPr id="5" name="Text 2"/>
+          <p:cNvPr id="4" name="Text 1"/>
           <p:cNvSpPr/>
           <p:nvPr/>
         </p:nvSpPr>
@@ -2243,7 +2214,7 @@
             <a:r>
               <a:rPr lang="en-US" sz="4000" b="1" dirty="0">
                 <a:solidFill>
-                  <a:srgbClr val="E6EDF3"/>
+                  <a:srgbClr val="1F2937"/>
                 </a:solidFill>
                 <a:latin typeface="Arial" pitchFamily="34" charset="0"/>
                 <a:ea typeface="Arial" pitchFamily="34" charset="-122"/>
@@ -2257,7 +2228,7 @@
       </p:sp>
       <p:sp>
         <p:nvSpPr>
-          <p:cNvPr id="6" name="Text 3"/>
+          <p:cNvPr id="5" name="Text 2"/>
           <p:cNvSpPr/>
           <p:nvPr/>
         </p:nvSpPr>
@@ -2282,7 +2253,7 @@
             <a:r>
               <a:rPr lang="en-US" sz="1400" dirty="0">
                 <a:solidFill>
-                  <a:srgbClr val="94A3B8"/>
+                  <a:srgbClr val="64748B"/>
                 </a:solidFill>
                 <a:latin typeface="Calibri" pitchFamily="34" charset="0"/>
                 <a:ea typeface="Calibri" pitchFamily="34" charset="-122"/>
@@ -2308,7 +2279,7 @@
     <p:bg>
       <p:bgPr>
         <a:solidFill>
-          <a:srgbClr val="0E1726"/>
+          <a:srgbClr val="FFFFFF"/>
         </a:solidFill>
       </p:bgPr>
     </p:bg>
@@ -2345,9 +2316,9 @@
           </a:solidFill>
           <a:ln/>
           <a:effectLst>
-            <a:outerShdw sx="100000" sy="100000" kx="0" ky="0" algn="bl" rotWithShape="0" blurRad="101600" dist="38100" dir="5400000">
+            <a:outerShdw sx="100000" sy="100000" kx="0" ky="0" algn="bl" rotWithShape="0" blurRad="76200" dist="25400" dir="5400000">
               <a:srgbClr val="000000">
-                <a:alpha val="35000"/>
+                <a:alpha val="12000"/>
               </a:srgbClr>
             </a:outerShdw>
           </a:effectLst>
@@ -2404,7 +2375,7 @@
             <a:r>
               <a:rPr lang="en-US" sz="2600" b="1" dirty="0">
                 <a:solidFill>
-                  <a:srgbClr val="E6EDF3"/>
+                  <a:srgbClr val="1F2937"/>
                 </a:solidFill>
                 <a:latin typeface="Arial" pitchFamily="34" charset="0"/>
                 <a:ea typeface="Arial" pitchFamily="34" charset="-122"/>
@@ -2433,13 +2404,13 @@
             </a:avLst>
           </a:prstGeom>
           <a:solidFill>
-            <a:srgbClr val="18243A"/>
+            <a:srgbClr val="F1F5F9"/>
           </a:solidFill>
           <a:ln/>
           <a:effectLst>
-            <a:outerShdw sx="100000" sy="100000" kx="0" ky="0" algn="bl" rotWithShape="0" blurRad="101600" dist="38100" dir="5400000">
+            <a:outerShdw sx="100000" sy="100000" kx="0" ky="0" algn="bl" rotWithShape="0" blurRad="76200" dist="25400" dir="5400000">
               <a:srgbClr val="000000">
-                <a:alpha val="35000"/>
+                <a:alpha val="12000"/>
               </a:srgbClr>
             </a:outerShdw>
           </a:effectLst>
@@ -2476,7 +2447,7 @@
             <a:r>
               <a:rPr lang="en-US" sz="1400" dirty="0">
                 <a:solidFill>
-                  <a:srgbClr val="E6EDF3"/>
+                  <a:srgbClr val="1F2937"/>
                 </a:solidFill>
                 <a:latin typeface="Calibri" pitchFamily="34" charset="0"/>
                 <a:ea typeface="Calibri" pitchFamily="34" charset="-122"/>
@@ -2497,7 +2468,7 @@
             <a:r>
               <a:rPr lang="en-US" sz="1400" dirty="0">
                 <a:solidFill>
-                  <a:srgbClr val="E6EDF3"/>
+                  <a:srgbClr val="1F2937"/>
                 </a:solidFill>
                 <a:latin typeface="Calibri" pitchFamily="34" charset="0"/>
                 <a:ea typeface="Calibri" pitchFamily="34" charset="-122"/>
@@ -2518,7 +2489,7 @@
             <a:r>
               <a:rPr lang="en-US" sz="1400" dirty="0">
                 <a:solidFill>
-                  <a:srgbClr val="E6EDF3"/>
+                  <a:srgbClr val="1F2937"/>
                 </a:solidFill>
                 <a:latin typeface="Calibri" pitchFamily="34" charset="0"/>
                 <a:ea typeface="Calibri" pitchFamily="34" charset="-122"/>
@@ -2557,7 +2528,7 @@
             <a:r>
               <a:rPr lang="en-US" sz="900" dirty="0">
                 <a:solidFill>
-                  <a:srgbClr val="94A3B8"/>
+                  <a:srgbClr val="64748B"/>
                 </a:solidFill>
                 <a:latin typeface="Calibri" pitchFamily="34" charset="0"/>
                 <a:ea typeface="Calibri" pitchFamily="34" charset="-122"/>
@@ -2569,38 +2540,9 @@
           </a:p>
         </p:txBody>
       </p:sp>
-      <p:sp>
-        <p:nvSpPr>
-          <p:cNvPr id="8" name="Shape 5"/>
-          <p:cNvSpPr/>
-          <p:nvPr/>
-        </p:nvSpPr>
-        <p:spPr>
-          <a:xfrm>
-            <a:off x="7772400" y="4590288"/>
-            <a:ext cx="969264" cy="475488"/>
-          </a:xfrm>
-          <a:prstGeom prst="roundRect">
-            <a:avLst>
-              <a:gd name="adj" fmla="val 11538"/>
-            </a:avLst>
-          </a:prstGeom>
-          <a:solidFill>
-            <a:srgbClr val="FFFFFF"/>
-          </a:solidFill>
-          <a:ln/>
-          <a:effectLst>
-            <a:outerShdw sx="100000" sy="100000" kx="0" ky="0" algn="bl" rotWithShape="0" blurRad="101600" dist="38100" dir="5400000">
-              <a:srgbClr val="000000">
-                <a:alpha val="35000"/>
-              </a:srgbClr>
-            </a:outerShdw>
-          </a:effectLst>
-        </p:spPr>
-      </p:sp>
       <p:pic>
         <p:nvPicPr>
-          <p:cNvPr id="9" name="Image 1" descr="/Users/pop7/Library/CloudStorage/OneDrive-MonsterConnectCo.,Ltd/Lecture/KOSEN69 - software-security/slides/pptx/assets/logo-small.png">    </p:cNvPr>
+          <p:cNvPr id="8" name="Image 1" descr="/Users/pop7/Library/CloudStorage/OneDrive-MonsterConnectCo.,Ltd/Lecture/KOSEN69 - software-security/slides/pptx/assets/logo-small.png">    </p:cNvPr>
           <p:cNvPicPr>
             <a:picLocks noChangeAspect="1"/>
           </p:cNvPicPr>
@@ -2614,7 +2556,7 @@
         </p:blipFill>
         <p:spPr>
           <a:xfrm>
-            <a:off x="7872984" y="4681728"/>
+            <a:off x="7882128" y="4700016"/>
             <a:ext cx="768096" cy="356616"/>
           </a:xfrm>
           <a:prstGeom prst="rect">
@@ -2636,7 +2578,7 @@
     <p:bg>
       <p:bgPr>
         <a:solidFill>
-          <a:srgbClr val="0E1726"/>
+          <a:srgbClr val="FFFFFF"/>
         </a:solidFill>
       </p:bgPr>
     </p:bg>
@@ -2673,9 +2615,9 @@
           </a:solidFill>
           <a:ln/>
           <a:effectLst>
-            <a:outerShdw sx="100000" sy="100000" kx="0" ky="0" algn="bl" rotWithShape="0" blurRad="101600" dist="38100" dir="5400000">
+            <a:outerShdw sx="100000" sy="100000" kx="0" ky="0" algn="bl" rotWithShape="0" blurRad="76200" dist="25400" dir="5400000">
               <a:srgbClr val="000000">
-                <a:alpha val="35000"/>
+                <a:alpha val="12000"/>
               </a:srgbClr>
             </a:outerShdw>
           </a:effectLst>
@@ -2732,7 +2674,7 @@
             <a:r>
               <a:rPr lang="en-US" sz="2600" b="1" dirty="0">
                 <a:solidFill>
-                  <a:srgbClr val="E6EDF3"/>
+                  <a:srgbClr val="1F2937"/>
                 </a:solidFill>
                 <a:latin typeface="Arial" pitchFamily="34" charset="0"/>
                 <a:ea typeface="Arial" pitchFamily="34" charset="-122"/>
@@ -2761,13 +2703,13 @@
             </a:avLst>
           </a:prstGeom>
           <a:solidFill>
-            <a:srgbClr val="18243A"/>
+            <a:srgbClr val="F1F5F9"/>
           </a:solidFill>
           <a:ln/>
           <a:effectLst>
-            <a:outerShdw sx="100000" sy="100000" kx="0" ky="0" algn="bl" rotWithShape="0" blurRad="101600" dist="38100" dir="5400000">
+            <a:outerShdw sx="100000" sy="100000" kx="0" ky="0" algn="bl" rotWithShape="0" blurRad="76200" dist="25400" dir="5400000">
               <a:srgbClr val="000000">
-                <a:alpha val="35000"/>
+                <a:alpha val="12000"/>
               </a:srgbClr>
             </a:outerShdw>
           </a:effectLst>
@@ -2804,7 +2746,7 @@
             <a:r>
               <a:rPr lang="en-US" sz="1400" dirty="0">
                 <a:solidFill>
-                  <a:srgbClr val="E6EDF3"/>
+                  <a:srgbClr val="1F2937"/>
                 </a:solidFill>
                 <a:latin typeface="Calibri" pitchFamily="34" charset="0"/>
                 <a:ea typeface="Calibri" pitchFamily="34" charset="-122"/>
@@ -2825,7 +2767,7 @@
             <a:r>
               <a:rPr lang="en-US" sz="1400" dirty="0">
                 <a:solidFill>
-                  <a:srgbClr val="E6EDF3"/>
+                  <a:srgbClr val="1F2937"/>
                 </a:solidFill>
                 <a:latin typeface="Calibri" pitchFamily="34" charset="0"/>
                 <a:ea typeface="Calibri" pitchFamily="34" charset="-122"/>
@@ -2846,7 +2788,7 @@
             <a:r>
               <a:rPr lang="en-US" sz="1400" dirty="0">
                 <a:solidFill>
-                  <a:srgbClr val="E6EDF3"/>
+                  <a:srgbClr val="1F2937"/>
                 </a:solidFill>
                 <a:latin typeface="Calibri" pitchFamily="34" charset="0"/>
                 <a:ea typeface="Calibri" pitchFamily="34" charset="-122"/>
@@ -2885,7 +2827,7 @@
             <a:r>
               <a:rPr lang="en-US" sz="900" dirty="0">
                 <a:solidFill>
-                  <a:srgbClr val="94A3B8"/>
+                  <a:srgbClr val="64748B"/>
                 </a:solidFill>
                 <a:latin typeface="Calibri" pitchFamily="34" charset="0"/>
                 <a:ea typeface="Calibri" pitchFamily="34" charset="-122"/>
@@ -2897,38 +2839,9 @@
           </a:p>
         </p:txBody>
       </p:sp>
-      <p:sp>
-        <p:nvSpPr>
-          <p:cNvPr id="8" name="Shape 5"/>
-          <p:cNvSpPr/>
-          <p:nvPr/>
-        </p:nvSpPr>
-        <p:spPr>
-          <a:xfrm>
-            <a:off x="7772400" y="4590288"/>
-            <a:ext cx="969264" cy="475488"/>
-          </a:xfrm>
-          <a:prstGeom prst="roundRect">
-            <a:avLst>
-              <a:gd name="adj" fmla="val 11538"/>
-            </a:avLst>
-          </a:prstGeom>
-          <a:solidFill>
-            <a:srgbClr val="FFFFFF"/>
-          </a:solidFill>
-          <a:ln/>
-          <a:effectLst>
-            <a:outerShdw sx="100000" sy="100000" kx="0" ky="0" algn="bl" rotWithShape="0" blurRad="101600" dist="38100" dir="5400000">
-              <a:srgbClr val="000000">
-                <a:alpha val="35000"/>
-              </a:srgbClr>
-            </a:outerShdw>
-          </a:effectLst>
-        </p:spPr>
-      </p:sp>
       <p:pic>
         <p:nvPicPr>
-          <p:cNvPr id="9" name="Image 1" descr="/Users/pop7/Library/CloudStorage/OneDrive-MonsterConnectCo.,Ltd/Lecture/KOSEN69 - software-security/slides/pptx/assets/logo-small.png">    </p:cNvPr>
+          <p:cNvPr id="8" name="Image 1" descr="/Users/pop7/Library/CloudStorage/OneDrive-MonsterConnectCo.,Ltd/Lecture/KOSEN69 - software-security/slides/pptx/assets/logo-small.png">    </p:cNvPr>
           <p:cNvPicPr>
             <a:picLocks noChangeAspect="1"/>
           </p:cNvPicPr>
@@ -2942,7 +2855,7 @@
         </p:blipFill>
         <p:spPr>
           <a:xfrm>
-            <a:off x="7872984" y="4681728"/>
+            <a:off x="7882128" y="4700016"/>
             <a:ext cx="768096" cy="356616"/>
           </a:xfrm>
           <a:prstGeom prst="rect">
@@ -2964,7 +2877,7 @@
     <p:bg>
       <p:bgPr>
         <a:solidFill>
-          <a:srgbClr val="0E1726"/>
+          <a:srgbClr val="FFFFFF"/>
         </a:solidFill>
       </p:bgPr>
     </p:bg>
@@ -3001,9 +2914,9 @@
           </a:solidFill>
           <a:ln/>
           <a:effectLst>
-            <a:outerShdw sx="100000" sy="100000" kx="0" ky="0" algn="bl" rotWithShape="0" blurRad="101600" dist="38100" dir="5400000">
+            <a:outerShdw sx="100000" sy="100000" kx="0" ky="0" algn="bl" rotWithShape="0" blurRad="76200" dist="25400" dir="5400000">
               <a:srgbClr val="000000">
-                <a:alpha val="35000"/>
+                <a:alpha val="12000"/>
               </a:srgbClr>
             </a:outerShdw>
           </a:effectLst>
@@ -3060,7 +2973,7 @@
             <a:r>
               <a:rPr lang="en-US" sz="2600" b="1" dirty="0">
                 <a:solidFill>
-                  <a:srgbClr val="E6EDF3"/>
+                  <a:srgbClr val="1F2937"/>
                 </a:solidFill>
                 <a:latin typeface="Arial" pitchFamily="34" charset="0"/>
                 <a:ea typeface="Arial" pitchFamily="34" charset="-122"/>
@@ -3089,13 +3002,13 @@
             </a:avLst>
           </a:prstGeom>
           <a:solidFill>
-            <a:srgbClr val="18243A"/>
+            <a:srgbClr val="F1F5F9"/>
           </a:solidFill>
           <a:ln/>
           <a:effectLst>
-            <a:outerShdw sx="100000" sy="100000" kx="0" ky="0" algn="bl" rotWithShape="0" blurRad="101600" dist="38100" dir="5400000">
+            <a:outerShdw sx="100000" sy="100000" kx="0" ky="0" algn="bl" rotWithShape="0" blurRad="76200" dist="25400" dir="5400000">
               <a:srgbClr val="000000">
-                <a:alpha val="35000"/>
+                <a:alpha val="12000"/>
               </a:srgbClr>
             </a:outerShdw>
           </a:effectLst>
@@ -3132,7 +3045,7 @@
             <a:r>
               <a:rPr lang="en-US" sz="1400" dirty="0">
                 <a:solidFill>
-                  <a:srgbClr val="E6EDF3"/>
+                  <a:srgbClr val="1F2937"/>
                 </a:solidFill>
                 <a:latin typeface="Calibri" pitchFamily="34" charset="0"/>
                 <a:ea typeface="Calibri" pitchFamily="34" charset="-122"/>
@@ -3153,7 +3066,7 @@
             <a:r>
               <a:rPr lang="en-US" sz="1400" dirty="0">
                 <a:solidFill>
-                  <a:srgbClr val="E6EDF3"/>
+                  <a:srgbClr val="1F2937"/>
                 </a:solidFill>
                 <a:latin typeface="Calibri" pitchFamily="34" charset="0"/>
                 <a:ea typeface="Calibri" pitchFamily="34" charset="-122"/>
@@ -3174,7 +3087,7 @@
             <a:r>
               <a:rPr lang="en-US" sz="1400" dirty="0">
                 <a:solidFill>
-                  <a:srgbClr val="E6EDF3"/>
+                  <a:srgbClr val="1F2937"/>
                 </a:solidFill>
                 <a:latin typeface="Calibri" pitchFamily="34" charset="0"/>
                 <a:ea typeface="Calibri" pitchFamily="34" charset="-122"/>
@@ -3213,7 +3126,7 @@
             <a:r>
               <a:rPr lang="en-US" sz="900" dirty="0">
                 <a:solidFill>
-                  <a:srgbClr val="94A3B8"/>
+                  <a:srgbClr val="64748B"/>
                 </a:solidFill>
                 <a:latin typeface="Calibri" pitchFamily="34" charset="0"/>
                 <a:ea typeface="Calibri" pitchFamily="34" charset="-122"/>
@@ -3225,38 +3138,9 @@
           </a:p>
         </p:txBody>
       </p:sp>
-      <p:sp>
-        <p:nvSpPr>
-          <p:cNvPr id="8" name="Shape 5"/>
-          <p:cNvSpPr/>
-          <p:nvPr/>
-        </p:nvSpPr>
-        <p:spPr>
-          <a:xfrm>
-            <a:off x="7772400" y="4590288"/>
-            <a:ext cx="969264" cy="475488"/>
-          </a:xfrm>
-          <a:prstGeom prst="roundRect">
-            <a:avLst>
-              <a:gd name="adj" fmla="val 11538"/>
-            </a:avLst>
-          </a:prstGeom>
-          <a:solidFill>
-            <a:srgbClr val="FFFFFF"/>
-          </a:solidFill>
-          <a:ln/>
-          <a:effectLst>
-            <a:outerShdw sx="100000" sy="100000" kx="0" ky="0" algn="bl" rotWithShape="0" blurRad="101600" dist="38100" dir="5400000">
-              <a:srgbClr val="000000">
-                <a:alpha val="35000"/>
-              </a:srgbClr>
-            </a:outerShdw>
-          </a:effectLst>
-        </p:spPr>
-      </p:sp>
       <p:pic>
         <p:nvPicPr>
-          <p:cNvPr id="9" name="Image 1" descr="/Users/pop7/Library/CloudStorage/OneDrive-MonsterConnectCo.,Ltd/Lecture/KOSEN69 - software-security/slides/pptx/assets/logo-small.png">    </p:cNvPr>
+          <p:cNvPr id="8" name="Image 1" descr="/Users/pop7/Library/CloudStorage/OneDrive-MonsterConnectCo.,Ltd/Lecture/KOSEN69 - software-security/slides/pptx/assets/logo-small.png">    </p:cNvPr>
           <p:cNvPicPr>
             <a:picLocks noChangeAspect="1"/>
           </p:cNvPicPr>
@@ -3270,7 +3154,7 @@
         </p:blipFill>
         <p:spPr>
           <a:xfrm>
-            <a:off x="7872984" y="4681728"/>
+            <a:off x="7882128" y="4700016"/>
             <a:ext cx="768096" cy="356616"/>
           </a:xfrm>
           <a:prstGeom prst="rect">
@@ -3292,7 +3176,7 @@
     <p:bg>
       <p:bgPr>
         <a:solidFill>
-          <a:srgbClr val="0E1726"/>
+          <a:srgbClr val="FFFFFF"/>
         </a:solidFill>
       </p:bgPr>
     </p:bg>
@@ -3329,9 +3213,9 @@
           </a:solidFill>
           <a:ln/>
           <a:effectLst>
-            <a:outerShdw sx="100000" sy="100000" kx="0" ky="0" algn="bl" rotWithShape="0" blurRad="101600" dist="38100" dir="5400000">
+            <a:outerShdw sx="100000" sy="100000" kx="0" ky="0" algn="bl" rotWithShape="0" blurRad="76200" dist="25400" dir="5400000">
               <a:srgbClr val="000000">
-                <a:alpha val="35000"/>
+                <a:alpha val="12000"/>
               </a:srgbClr>
             </a:outerShdw>
           </a:effectLst>
@@ -3388,7 +3272,7 @@
             <a:r>
               <a:rPr lang="en-US" sz="2600" b="1" dirty="0">
                 <a:solidFill>
-                  <a:srgbClr val="E6EDF3"/>
+                  <a:srgbClr val="1F2937"/>
                 </a:solidFill>
                 <a:latin typeface="Arial" pitchFamily="34" charset="0"/>
                 <a:ea typeface="Arial" pitchFamily="34" charset="-122"/>
@@ -3417,13 +3301,13 @@
             </a:avLst>
           </a:prstGeom>
           <a:solidFill>
-            <a:srgbClr val="18243A"/>
+            <a:srgbClr val="F1F5F9"/>
           </a:solidFill>
           <a:ln/>
           <a:effectLst>
-            <a:outerShdw sx="100000" sy="100000" kx="0" ky="0" algn="bl" rotWithShape="0" blurRad="101600" dist="38100" dir="5400000">
+            <a:outerShdw sx="100000" sy="100000" kx="0" ky="0" algn="bl" rotWithShape="0" blurRad="76200" dist="25400" dir="5400000">
               <a:srgbClr val="000000">
-                <a:alpha val="35000"/>
+                <a:alpha val="12000"/>
               </a:srgbClr>
             </a:outerShdw>
           </a:effectLst>
@@ -3460,7 +3344,7 @@
             <a:r>
               <a:rPr lang="en-US" sz="1400" dirty="0">
                 <a:solidFill>
-                  <a:srgbClr val="E6EDF3"/>
+                  <a:srgbClr val="1F2937"/>
                 </a:solidFill>
                 <a:latin typeface="Calibri" pitchFamily="34" charset="0"/>
                 <a:ea typeface="Calibri" pitchFamily="34" charset="-122"/>
@@ -3481,7 +3365,7 @@
             <a:r>
               <a:rPr lang="en-US" sz="1400" dirty="0">
                 <a:solidFill>
-                  <a:srgbClr val="E6EDF3"/>
+                  <a:srgbClr val="1F2937"/>
                 </a:solidFill>
                 <a:latin typeface="Calibri" pitchFamily="34" charset="0"/>
                 <a:ea typeface="Calibri" pitchFamily="34" charset="-122"/>
@@ -3520,7 +3404,7 @@
             <a:r>
               <a:rPr lang="en-US" sz="900" dirty="0">
                 <a:solidFill>
-                  <a:srgbClr val="94A3B8"/>
+                  <a:srgbClr val="64748B"/>
                 </a:solidFill>
                 <a:latin typeface="Calibri" pitchFamily="34" charset="0"/>
                 <a:ea typeface="Calibri" pitchFamily="34" charset="-122"/>
@@ -3532,38 +3416,9 @@
           </a:p>
         </p:txBody>
       </p:sp>
-      <p:sp>
-        <p:nvSpPr>
-          <p:cNvPr id="8" name="Shape 5"/>
-          <p:cNvSpPr/>
-          <p:nvPr/>
-        </p:nvSpPr>
-        <p:spPr>
-          <a:xfrm>
-            <a:off x="7772400" y="4590288"/>
-            <a:ext cx="969264" cy="475488"/>
-          </a:xfrm>
-          <a:prstGeom prst="roundRect">
-            <a:avLst>
-              <a:gd name="adj" fmla="val 11538"/>
-            </a:avLst>
-          </a:prstGeom>
-          <a:solidFill>
-            <a:srgbClr val="FFFFFF"/>
-          </a:solidFill>
-          <a:ln/>
-          <a:effectLst>
-            <a:outerShdw sx="100000" sy="100000" kx="0" ky="0" algn="bl" rotWithShape="0" blurRad="101600" dist="38100" dir="5400000">
-              <a:srgbClr val="000000">
-                <a:alpha val="35000"/>
-              </a:srgbClr>
-            </a:outerShdw>
-          </a:effectLst>
-        </p:spPr>
-      </p:sp>
       <p:pic>
         <p:nvPicPr>
-          <p:cNvPr id="9" name="Image 1" descr="/Users/pop7/Library/CloudStorage/OneDrive-MonsterConnectCo.,Ltd/Lecture/KOSEN69 - software-security/slides/pptx/assets/logo-small.png">    </p:cNvPr>
+          <p:cNvPr id="8" name="Image 1" descr="/Users/pop7/Library/CloudStorage/OneDrive-MonsterConnectCo.,Ltd/Lecture/KOSEN69 - software-security/slides/pptx/assets/logo-small.png">    </p:cNvPr>
           <p:cNvPicPr>
             <a:picLocks noChangeAspect="1"/>
           </p:cNvPicPr>
@@ -3577,7 +3432,7 @@
         </p:blipFill>
         <p:spPr>
           <a:xfrm>
-            <a:off x="7872984" y="4681728"/>
+            <a:off x="7882128" y="4700016"/>
             <a:ext cx="768096" cy="356616"/>
           </a:xfrm>
           <a:prstGeom prst="rect">
@@ -3599,7 +3454,7 @@
     <p:bg>
       <p:bgPr>
         <a:solidFill>
-          <a:srgbClr val="0E1726"/>
+          <a:srgbClr val="FFFFFF"/>
         </a:solidFill>
       </p:bgPr>
     </p:bg>
@@ -3636,9 +3491,9 @@
           </a:solidFill>
           <a:ln/>
           <a:effectLst>
-            <a:outerShdw sx="100000" sy="100000" kx="0" ky="0" algn="bl" rotWithShape="0" blurRad="101600" dist="38100" dir="5400000">
+            <a:outerShdw sx="100000" sy="100000" kx="0" ky="0" algn="bl" rotWithShape="0" blurRad="76200" dist="25400" dir="5400000">
               <a:srgbClr val="000000">
-                <a:alpha val="35000"/>
+                <a:alpha val="12000"/>
               </a:srgbClr>
             </a:outerShdw>
           </a:effectLst>
@@ -3695,7 +3550,7 @@
             <a:r>
               <a:rPr lang="en-US" sz="2600" b="1" dirty="0">
                 <a:solidFill>
-                  <a:srgbClr val="E6EDF3"/>
+                  <a:srgbClr val="1F2937"/>
                 </a:solidFill>
                 <a:latin typeface="Arial" pitchFamily="34" charset="0"/>
                 <a:ea typeface="Arial" pitchFamily="34" charset="-122"/>
@@ -3724,13 +3579,13 @@
             </a:avLst>
           </a:prstGeom>
           <a:solidFill>
-            <a:srgbClr val="18243A"/>
+            <a:srgbClr val="F1F5F9"/>
           </a:solidFill>
           <a:ln/>
           <a:effectLst>
-            <a:outerShdw sx="100000" sy="100000" kx="0" ky="0" algn="bl" rotWithShape="0" blurRad="101600" dist="38100" dir="5400000">
+            <a:outerShdw sx="100000" sy="100000" kx="0" ky="0" algn="bl" rotWithShape="0" blurRad="76200" dist="25400" dir="5400000">
               <a:srgbClr val="000000">
-                <a:alpha val="35000"/>
+                <a:alpha val="12000"/>
               </a:srgbClr>
             </a:outerShdw>
           </a:effectLst>
@@ -3767,7 +3622,7 @@
             <a:r>
               <a:rPr lang="en-US" sz="1400" dirty="0">
                 <a:solidFill>
-                  <a:srgbClr val="E6EDF3"/>
+                  <a:srgbClr val="1F2937"/>
                 </a:solidFill>
                 <a:latin typeface="Calibri" pitchFamily="34" charset="0"/>
                 <a:ea typeface="Calibri" pitchFamily="34" charset="-122"/>
@@ -3788,7 +3643,7 @@
             <a:r>
               <a:rPr lang="en-US" sz="1400" dirty="0">
                 <a:solidFill>
-                  <a:srgbClr val="E6EDF3"/>
+                  <a:srgbClr val="1F2937"/>
                 </a:solidFill>
                 <a:latin typeface="Calibri" pitchFamily="34" charset="0"/>
                 <a:ea typeface="Calibri" pitchFamily="34" charset="-122"/>
@@ -3809,7 +3664,7 @@
             <a:r>
               <a:rPr lang="en-US" sz="1400" dirty="0">
                 <a:solidFill>
-                  <a:srgbClr val="E6EDF3"/>
+                  <a:srgbClr val="1F2937"/>
                 </a:solidFill>
                 <a:latin typeface="Calibri" pitchFamily="34" charset="0"/>
                 <a:ea typeface="Calibri" pitchFamily="34" charset="-122"/>
@@ -3848,7 +3703,7 @@
             <a:r>
               <a:rPr lang="en-US" sz="900" dirty="0">
                 <a:solidFill>
-                  <a:srgbClr val="94A3B8"/>
+                  <a:srgbClr val="64748B"/>
                 </a:solidFill>
                 <a:latin typeface="Calibri" pitchFamily="34" charset="0"/>
                 <a:ea typeface="Calibri" pitchFamily="34" charset="-122"/>
@@ -3860,38 +3715,9 @@
           </a:p>
         </p:txBody>
       </p:sp>
-      <p:sp>
-        <p:nvSpPr>
-          <p:cNvPr id="8" name="Shape 5"/>
-          <p:cNvSpPr/>
-          <p:nvPr/>
-        </p:nvSpPr>
-        <p:spPr>
-          <a:xfrm>
-            <a:off x="7772400" y="4590288"/>
-            <a:ext cx="969264" cy="475488"/>
-          </a:xfrm>
-          <a:prstGeom prst="roundRect">
-            <a:avLst>
-              <a:gd name="adj" fmla="val 11538"/>
-            </a:avLst>
-          </a:prstGeom>
-          <a:solidFill>
-            <a:srgbClr val="FFFFFF"/>
-          </a:solidFill>
-          <a:ln/>
-          <a:effectLst>
-            <a:outerShdw sx="100000" sy="100000" kx="0" ky="0" algn="bl" rotWithShape="0" blurRad="101600" dist="38100" dir="5400000">
-              <a:srgbClr val="000000">
-                <a:alpha val="35000"/>
-              </a:srgbClr>
-            </a:outerShdw>
-          </a:effectLst>
-        </p:spPr>
-      </p:sp>
       <p:pic>
         <p:nvPicPr>
-          <p:cNvPr id="9" name="Image 1" descr="/Users/pop7/Library/CloudStorage/OneDrive-MonsterConnectCo.,Ltd/Lecture/KOSEN69 - software-security/slides/pptx/assets/logo-small.png">    </p:cNvPr>
+          <p:cNvPr id="8" name="Image 1" descr="/Users/pop7/Library/CloudStorage/OneDrive-MonsterConnectCo.,Ltd/Lecture/KOSEN69 - software-security/slides/pptx/assets/logo-small.png">    </p:cNvPr>
           <p:cNvPicPr>
             <a:picLocks noChangeAspect="1"/>
           </p:cNvPicPr>
@@ -3905,7 +3731,7 @@
         </p:blipFill>
         <p:spPr>
           <a:xfrm>
-            <a:off x="7872984" y="4681728"/>
+            <a:off x="7882128" y="4700016"/>
             <a:ext cx="768096" cy="356616"/>
           </a:xfrm>
           <a:prstGeom prst="rect">
@@ -3927,7 +3753,7 @@
     <p:bg>
       <p:bgPr>
         <a:solidFill>
-          <a:srgbClr val="0E1726"/>
+          <a:srgbClr val="FFFFFF"/>
         </a:solidFill>
       </p:bgPr>
     </p:bg>
@@ -3972,7 +3798,7 @@
             <a:r>
               <a:rPr lang="en-US" sz="4600" b="1" dirty="0">
                 <a:solidFill>
-                  <a:srgbClr val="E6EDF3"/>
+                  <a:srgbClr val="1F2937"/>
                 </a:solidFill>
                 <a:latin typeface="Arial" pitchFamily="34" charset="0"/>
                 <a:ea typeface="Arial" pitchFamily="34" charset="-122"/>
@@ -4023,38 +3849,9 @@
           </a:p>
         </p:txBody>
       </p:sp>
-      <p:sp>
-        <p:nvSpPr>
-          <p:cNvPr id="4" name="Shape 2"/>
-          <p:cNvSpPr/>
-          <p:nvPr/>
-        </p:nvSpPr>
-        <p:spPr>
-          <a:xfrm>
-            <a:off x="7772400" y="4590288"/>
-            <a:ext cx="969264" cy="475488"/>
-          </a:xfrm>
-          <a:prstGeom prst="roundRect">
-            <a:avLst>
-              <a:gd name="adj" fmla="val 11538"/>
-            </a:avLst>
-          </a:prstGeom>
-          <a:solidFill>
-            <a:srgbClr val="FFFFFF"/>
-          </a:solidFill>
-          <a:ln/>
-          <a:effectLst>
-            <a:outerShdw sx="100000" sy="100000" kx="0" ky="0" algn="bl" rotWithShape="0" blurRad="101600" dist="38100" dir="5400000">
-              <a:srgbClr val="000000">
-                <a:alpha val="35000"/>
-              </a:srgbClr>
-            </a:outerShdw>
-          </a:effectLst>
-        </p:spPr>
-      </p:sp>
       <p:pic>
         <p:nvPicPr>
-          <p:cNvPr id="5" name="Image 0" descr="/Users/pop7/Library/CloudStorage/OneDrive-MonsterConnectCo.,Ltd/Lecture/KOSEN69 - software-security/slides/pptx/assets/logo-small.png">    </p:cNvPr>
+          <p:cNvPr id="4" name="Image 0" descr="/Users/pop7/Library/CloudStorage/OneDrive-MonsterConnectCo.,Ltd/Lecture/KOSEN69 - software-security/slides/pptx/assets/logo-small.png">    </p:cNvPr>
           <p:cNvPicPr>
             <a:picLocks noChangeAspect="1"/>
           </p:cNvPicPr>
@@ -4068,7 +3865,7 @@
         </p:blipFill>
         <p:spPr>
           <a:xfrm>
-            <a:off x="7872984" y="4681728"/>
+            <a:off x="7882128" y="4700016"/>
             <a:ext cx="768096" cy="356616"/>
           </a:xfrm>
           <a:prstGeom prst="rect">
@@ -4090,7 +3887,7 @@
     <p:bg>
       <p:bgPr>
         <a:solidFill>
-          <a:srgbClr val="0E1726"/>
+          <a:srgbClr val="FFFFFF"/>
         </a:solidFill>
       </p:bgPr>
     </p:bg>
@@ -4127,9 +3924,9 @@
           </a:solidFill>
           <a:ln/>
           <a:effectLst>
-            <a:outerShdw sx="100000" sy="100000" kx="0" ky="0" algn="bl" rotWithShape="0" blurRad="101600" dist="38100" dir="5400000">
+            <a:outerShdw sx="100000" sy="100000" kx="0" ky="0" algn="bl" rotWithShape="0" blurRad="76200" dist="25400" dir="5400000">
               <a:srgbClr val="000000">
-                <a:alpha val="35000"/>
+                <a:alpha val="12000"/>
               </a:srgbClr>
             </a:outerShdw>
           </a:effectLst>
@@ -4186,7 +3983,7 @@
             <a:r>
               <a:rPr lang="en-US" sz="2600" b="1" dirty="0">
                 <a:solidFill>
-                  <a:srgbClr val="E6EDF3"/>
+                  <a:srgbClr val="1F2937"/>
                 </a:solidFill>
                 <a:latin typeface="Arial" pitchFamily="34" charset="0"/>
                 <a:ea typeface="Arial" pitchFamily="34" charset="-122"/>
@@ -4215,13 +4012,13 @@
             </a:avLst>
           </a:prstGeom>
           <a:solidFill>
-            <a:srgbClr val="18243A"/>
+            <a:srgbClr val="F1F5F9"/>
           </a:solidFill>
           <a:ln/>
           <a:effectLst>
-            <a:outerShdw sx="100000" sy="100000" kx="0" ky="0" algn="bl" rotWithShape="0" blurRad="101600" dist="38100" dir="5400000">
+            <a:outerShdw sx="100000" sy="100000" kx="0" ky="0" algn="bl" rotWithShape="0" blurRad="76200" dist="25400" dir="5400000">
               <a:srgbClr val="000000">
-                <a:alpha val="35000"/>
+                <a:alpha val="12000"/>
               </a:srgbClr>
             </a:outerShdw>
           </a:effectLst>
@@ -4258,7 +4055,7 @@
             <a:r>
               <a:rPr lang="en-US" sz="1400" dirty="0">
                 <a:solidFill>
-                  <a:srgbClr val="E6EDF3"/>
+                  <a:srgbClr val="1F2937"/>
                 </a:solidFill>
                 <a:latin typeface="Calibri" pitchFamily="34" charset="0"/>
                 <a:ea typeface="Calibri" pitchFamily="34" charset="-122"/>
@@ -4279,7 +4076,7 @@
             <a:r>
               <a:rPr lang="en-US" sz="1400" dirty="0">
                 <a:solidFill>
-                  <a:srgbClr val="E6EDF3"/>
+                  <a:srgbClr val="1F2937"/>
                 </a:solidFill>
                 <a:latin typeface="Calibri" pitchFamily="34" charset="0"/>
                 <a:ea typeface="Calibri" pitchFamily="34" charset="-122"/>
@@ -4300,7 +4097,7 @@
             <a:r>
               <a:rPr lang="en-US" sz="1400" dirty="0">
                 <a:solidFill>
-                  <a:srgbClr val="E6EDF3"/>
+                  <a:srgbClr val="1F2937"/>
                 </a:solidFill>
                 <a:latin typeface="Calibri" pitchFamily="34" charset="0"/>
                 <a:ea typeface="Calibri" pitchFamily="34" charset="-122"/>
@@ -4321,7 +4118,7 @@
             <a:r>
               <a:rPr lang="en-US" sz="1400" dirty="0">
                 <a:solidFill>
-                  <a:srgbClr val="E6EDF3"/>
+                  <a:srgbClr val="1F2937"/>
                 </a:solidFill>
                 <a:latin typeface="Calibri" pitchFamily="34" charset="0"/>
                 <a:ea typeface="Calibri" pitchFamily="34" charset="-122"/>
@@ -4342,7 +4139,7 @@
             <a:r>
               <a:rPr lang="en-US" sz="1400" dirty="0">
                 <a:solidFill>
-                  <a:srgbClr val="E6EDF3"/>
+                  <a:srgbClr val="1F2937"/>
                 </a:solidFill>
                 <a:latin typeface="Calibri" pitchFamily="34" charset="0"/>
                 <a:ea typeface="Calibri" pitchFamily="34" charset="-122"/>
@@ -4381,7 +4178,7 @@
             <a:r>
               <a:rPr lang="en-US" sz="900" dirty="0">
                 <a:solidFill>
-                  <a:srgbClr val="94A3B8"/>
+                  <a:srgbClr val="64748B"/>
                 </a:solidFill>
                 <a:latin typeface="Calibri" pitchFamily="34" charset="0"/>
                 <a:ea typeface="Calibri" pitchFamily="34" charset="-122"/>
@@ -4393,38 +4190,9 @@
           </a:p>
         </p:txBody>
       </p:sp>
-      <p:sp>
-        <p:nvSpPr>
-          <p:cNvPr id="8" name="Shape 5"/>
-          <p:cNvSpPr/>
-          <p:nvPr/>
-        </p:nvSpPr>
-        <p:spPr>
-          <a:xfrm>
-            <a:off x="7772400" y="4590288"/>
-            <a:ext cx="969264" cy="475488"/>
-          </a:xfrm>
-          <a:prstGeom prst="roundRect">
-            <a:avLst>
-              <a:gd name="adj" fmla="val 11538"/>
-            </a:avLst>
-          </a:prstGeom>
-          <a:solidFill>
-            <a:srgbClr val="FFFFFF"/>
-          </a:solidFill>
-          <a:ln/>
-          <a:effectLst>
-            <a:outerShdw sx="100000" sy="100000" kx="0" ky="0" algn="bl" rotWithShape="0" blurRad="101600" dist="38100" dir="5400000">
-              <a:srgbClr val="000000">
-                <a:alpha val="35000"/>
-              </a:srgbClr>
-            </a:outerShdw>
-          </a:effectLst>
-        </p:spPr>
-      </p:sp>
       <p:pic>
         <p:nvPicPr>
-          <p:cNvPr id="9" name="Image 1" descr="/Users/pop7/Library/CloudStorage/OneDrive-MonsterConnectCo.,Ltd/Lecture/KOSEN69 - software-security/slides/pptx/assets/logo-small.png">    </p:cNvPr>
+          <p:cNvPr id="8" name="Image 1" descr="/Users/pop7/Library/CloudStorage/OneDrive-MonsterConnectCo.,Ltd/Lecture/KOSEN69 - software-security/slides/pptx/assets/logo-small.png">    </p:cNvPr>
           <p:cNvPicPr>
             <a:picLocks noChangeAspect="1"/>
           </p:cNvPicPr>
@@ -4438,7 +4206,7 @@
         </p:blipFill>
         <p:spPr>
           <a:xfrm>
-            <a:off x="7872984" y="4681728"/>
+            <a:off x="7882128" y="4700016"/>
             <a:ext cx="768096" cy="356616"/>
           </a:xfrm>
           <a:prstGeom prst="rect">
@@ -4460,7 +4228,7 @@
     <p:bg>
       <p:bgPr>
         <a:solidFill>
-          <a:srgbClr val="0E1726"/>
+          <a:srgbClr val="FFFFFF"/>
         </a:solidFill>
       </p:bgPr>
     </p:bg>
@@ -4497,9 +4265,9 @@
           </a:solidFill>
           <a:ln/>
           <a:effectLst>
-            <a:outerShdw sx="100000" sy="100000" kx="0" ky="0" algn="bl" rotWithShape="0" blurRad="101600" dist="38100" dir="5400000">
+            <a:outerShdw sx="100000" sy="100000" kx="0" ky="0" algn="bl" rotWithShape="0" blurRad="76200" dist="25400" dir="5400000">
               <a:srgbClr val="000000">
-                <a:alpha val="35000"/>
+                <a:alpha val="12000"/>
               </a:srgbClr>
             </a:outerShdw>
           </a:effectLst>
@@ -4556,7 +4324,7 @@
             <a:r>
               <a:rPr lang="en-US" sz="2600" b="1" dirty="0">
                 <a:solidFill>
-                  <a:srgbClr val="E6EDF3"/>
+                  <a:srgbClr val="1F2937"/>
                 </a:solidFill>
                 <a:latin typeface="Arial" pitchFamily="34" charset="0"/>
                 <a:ea typeface="Arial" pitchFamily="34" charset="-122"/>
@@ -4585,13 +4353,13 @@
             </a:avLst>
           </a:prstGeom>
           <a:solidFill>
-            <a:srgbClr val="18243A"/>
+            <a:srgbClr val="F1F5F9"/>
           </a:solidFill>
           <a:ln/>
           <a:effectLst>
-            <a:outerShdw sx="100000" sy="100000" kx="0" ky="0" algn="bl" rotWithShape="0" blurRad="101600" dist="38100" dir="5400000">
+            <a:outerShdw sx="100000" sy="100000" kx="0" ky="0" algn="bl" rotWithShape="0" blurRad="76200" dist="25400" dir="5400000">
               <a:srgbClr val="000000">
-                <a:alpha val="35000"/>
+                <a:alpha val="12000"/>
               </a:srgbClr>
             </a:outerShdw>
           </a:effectLst>
@@ -4628,7 +4396,7 @@
             <a:r>
               <a:rPr lang="en-US" sz="1400" dirty="0">
                 <a:solidFill>
-                  <a:srgbClr val="E6EDF3"/>
+                  <a:srgbClr val="1F2937"/>
                 </a:solidFill>
                 <a:latin typeface="Calibri" pitchFamily="34" charset="0"/>
                 <a:ea typeface="Calibri" pitchFamily="34" charset="-122"/>
@@ -4649,7 +4417,7 @@
             <a:r>
               <a:rPr lang="en-US" sz="1400" dirty="0">
                 <a:solidFill>
-                  <a:srgbClr val="E6EDF3"/>
+                  <a:srgbClr val="1F2937"/>
                 </a:solidFill>
                 <a:latin typeface="Calibri" pitchFamily="34" charset="0"/>
                 <a:ea typeface="Calibri" pitchFamily="34" charset="-122"/>
@@ -4670,7 +4438,7 @@
             <a:r>
               <a:rPr lang="en-US" sz="1400" dirty="0">
                 <a:solidFill>
-                  <a:srgbClr val="E6EDF3"/>
+                  <a:srgbClr val="1F2937"/>
                 </a:solidFill>
                 <a:latin typeface="Calibri" pitchFamily="34" charset="0"/>
                 <a:ea typeface="Calibri" pitchFamily="34" charset="-122"/>
@@ -4709,7 +4477,7 @@
             <a:r>
               <a:rPr lang="en-US" sz="900" dirty="0">
                 <a:solidFill>
-                  <a:srgbClr val="94A3B8"/>
+                  <a:srgbClr val="64748B"/>
                 </a:solidFill>
                 <a:latin typeface="Calibri" pitchFamily="34" charset="0"/>
                 <a:ea typeface="Calibri" pitchFamily="34" charset="-122"/>
@@ -4721,38 +4489,9 @@
           </a:p>
         </p:txBody>
       </p:sp>
-      <p:sp>
-        <p:nvSpPr>
-          <p:cNvPr id="8" name="Shape 5"/>
-          <p:cNvSpPr/>
-          <p:nvPr/>
-        </p:nvSpPr>
-        <p:spPr>
-          <a:xfrm>
-            <a:off x="7772400" y="4590288"/>
-            <a:ext cx="969264" cy="475488"/>
-          </a:xfrm>
-          <a:prstGeom prst="roundRect">
-            <a:avLst>
-              <a:gd name="adj" fmla="val 11538"/>
-            </a:avLst>
-          </a:prstGeom>
-          <a:solidFill>
-            <a:srgbClr val="FFFFFF"/>
-          </a:solidFill>
-          <a:ln/>
-          <a:effectLst>
-            <a:outerShdw sx="100000" sy="100000" kx="0" ky="0" algn="bl" rotWithShape="0" blurRad="101600" dist="38100" dir="5400000">
-              <a:srgbClr val="000000">
-                <a:alpha val="35000"/>
-              </a:srgbClr>
-            </a:outerShdw>
-          </a:effectLst>
-        </p:spPr>
-      </p:sp>
       <p:pic>
         <p:nvPicPr>
-          <p:cNvPr id="9" name="Image 1" descr="/Users/pop7/Library/CloudStorage/OneDrive-MonsterConnectCo.,Ltd/Lecture/KOSEN69 - software-security/slides/pptx/assets/logo-small.png">    </p:cNvPr>
+          <p:cNvPr id="8" name="Image 1" descr="/Users/pop7/Library/CloudStorage/OneDrive-MonsterConnectCo.,Ltd/Lecture/KOSEN69 - software-security/slides/pptx/assets/logo-small.png">    </p:cNvPr>
           <p:cNvPicPr>
             <a:picLocks noChangeAspect="1"/>
           </p:cNvPicPr>
@@ -4766,7 +4505,7 @@
         </p:blipFill>
         <p:spPr>
           <a:xfrm>
-            <a:off x="7872984" y="4681728"/>
+            <a:off x="7882128" y="4700016"/>
             <a:ext cx="768096" cy="356616"/>
           </a:xfrm>
           <a:prstGeom prst="rect">
@@ -4788,7 +4527,7 @@
     <p:bg>
       <p:bgPr>
         <a:solidFill>
-          <a:srgbClr val="0E1726"/>
+          <a:srgbClr val="FFFFFF"/>
         </a:solidFill>
       </p:bgPr>
     </p:bg>
@@ -4825,9 +4564,9 @@
           </a:solidFill>
           <a:ln/>
           <a:effectLst>
-            <a:outerShdw sx="100000" sy="100000" kx="0" ky="0" algn="bl" rotWithShape="0" blurRad="101600" dist="38100" dir="5400000">
+            <a:outerShdw sx="100000" sy="100000" kx="0" ky="0" algn="bl" rotWithShape="0" blurRad="76200" dist="25400" dir="5400000">
               <a:srgbClr val="000000">
-                <a:alpha val="35000"/>
+                <a:alpha val="12000"/>
               </a:srgbClr>
             </a:outerShdw>
           </a:effectLst>
@@ -4884,7 +4623,7 @@
             <a:r>
               <a:rPr lang="en-US" sz="2600" b="1" dirty="0">
                 <a:solidFill>
-                  <a:srgbClr val="E6EDF3"/>
+                  <a:srgbClr val="1F2937"/>
                 </a:solidFill>
                 <a:latin typeface="Arial" pitchFamily="34" charset="0"/>
                 <a:ea typeface="Arial" pitchFamily="34" charset="-122"/>
@@ -4917,7 +4656,7 @@
           </a:solidFill>
           <a:ln w="12700">
             <a:solidFill>
-              <a:srgbClr val="1E2B45"/>
+              <a:srgbClr val="E8EDF3"/>
             </a:solidFill>
             <a:prstDash val="solid"/>
           </a:ln>
@@ -5047,13 +4786,13 @@
             </a:avLst>
           </a:prstGeom>
           <a:solidFill>
-            <a:srgbClr val="18243A"/>
+            <a:srgbClr val="F1F5F9"/>
           </a:solidFill>
           <a:ln/>
           <a:effectLst>
-            <a:outerShdw sx="100000" sy="100000" kx="0" ky="0" algn="bl" rotWithShape="0" blurRad="101600" dist="38100" dir="5400000">
+            <a:outerShdw sx="100000" sy="100000" kx="0" ky="0" algn="bl" rotWithShape="0" blurRad="76200" dist="25400" dir="5400000">
               <a:srgbClr val="000000">
-                <a:alpha val="35000"/>
+                <a:alpha val="12000"/>
               </a:srgbClr>
             </a:outerShdw>
           </a:effectLst>
@@ -5090,7 +4829,7 @@
             <a:r>
               <a:rPr lang="en-US" sz="1400" dirty="0">
                 <a:solidFill>
-                  <a:srgbClr val="E6EDF3"/>
+                  <a:srgbClr val="1F2937"/>
                 </a:solidFill>
                 <a:latin typeface="Calibri" pitchFamily="34" charset="0"/>
                 <a:ea typeface="Calibri" pitchFamily="34" charset="-122"/>
@@ -5129,7 +4868,7 @@
             <a:r>
               <a:rPr lang="en-US" sz="900" dirty="0">
                 <a:solidFill>
-                  <a:srgbClr val="94A3B8"/>
+                  <a:srgbClr val="64748B"/>
                 </a:solidFill>
                 <a:latin typeface="Calibri" pitchFamily="34" charset="0"/>
                 <a:ea typeface="Calibri" pitchFamily="34" charset="-122"/>
@@ -5141,38 +4880,9 @@
           </a:p>
         </p:txBody>
       </p:sp>
-      <p:sp>
-        <p:nvSpPr>
-          <p:cNvPr id="10" name="Shape 7"/>
-          <p:cNvSpPr/>
-          <p:nvPr/>
-        </p:nvSpPr>
-        <p:spPr>
-          <a:xfrm>
-            <a:off x="7772400" y="4590288"/>
-            <a:ext cx="969264" cy="475488"/>
-          </a:xfrm>
-          <a:prstGeom prst="roundRect">
-            <a:avLst>
-              <a:gd name="adj" fmla="val 11538"/>
-            </a:avLst>
-          </a:prstGeom>
-          <a:solidFill>
-            <a:srgbClr val="FFFFFF"/>
-          </a:solidFill>
-          <a:ln/>
-          <a:effectLst>
-            <a:outerShdw sx="100000" sy="100000" kx="0" ky="0" algn="bl" rotWithShape="0" blurRad="101600" dist="38100" dir="5400000">
-              <a:srgbClr val="000000">
-                <a:alpha val="35000"/>
-              </a:srgbClr>
-            </a:outerShdw>
-          </a:effectLst>
-        </p:spPr>
-      </p:sp>
       <p:pic>
         <p:nvPicPr>
-          <p:cNvPr id="11" name="Image 1" descr="/Users/pop7/Library/CloudStorage/OneDrive-MonsterConnectCo.,Ltd/Lecture/KOSEN69 - software-security/slides/pptx/assets/logo-small.png">    </p:cNvPr>
+          <p:cNvPr id="10" name="Image 1" descr="/Users/pop7/Library/CloudStorage/OneDrive-MonsterConnectCo.,Ltd/Lecture/KOSEN69 - software-security/slides/pptx/assets/logo-small.png">    </p:cNvPr>
           <p:cNvPicPr>
             <a:picLocks noChangeAspect="1"/>
           </p:cNvPicPr>
@@ -5186,7 +4896,7 @@
         </p:blipFill>
         <p:spPr>
           <a:xfrm>
-            <a:off x="7872984" y="4681728"/>
+            <a:off x="7882128" y="4700016"/>
             <a:ext cx="768096" cy="356616"/>
           </a:xfrm>
           <a:prstGeom prst="rect">
@@ -5208,7 +4918,7 @@
     <p:bg>
       <p:bgPr>
         <a:solidFill>
-          <a:srgbClr val="0E1726"/>
+          <a:srgbClr val="FFFFFF"/>
         </a:solidFill>
       </p:bgPr>
     </p:bg>
@@ -5245,9 +4955,9 @@
           </a:solidFill>
           <a:ln/>
           <a:effectLst>
-            <a:outerShdw sx="100000" sy="100000" kx="0" ky="0" algn="bl" rotWithShape="0" blurRad="101600" dist="38100" dir="5400000">
+            <a:outerShdw sx="100000" sy="100000" kx="0" ky="0" algn="bl" rotWithShape="0" blurRad="76200" dist="25400" dir="5400000">
               <a:srgbClr val="000000">
-                <a:alpha val="35000"/>
+                <a:alpha val="12000"/>
               </a:srgbClr>
             </a:outerShdw>
           </a:effectLst>
@@ -5304,7 +5014,7 @@
             <a:r>
               <a:rPr lang="en-US" sz="2600" b="1" dirty="0">
                 <a:solidFill>
-                  <a:srgbClr val="E6EDF3"/>
+                  <a:srgbClr val="1F2937"/>
                 </a:solidFill>
                 <a:latin typeface="Arial" pitchFamily="34" charset="0"/>
                 <a:ea typeface="Arial" pitchFamily="34" charset="-122"/>
@@ -5333,13 +5043,13 @@
             </a:avLst>
           </a:prstGeom>
           <a:solidFill>
-            <a:srgbClr val="18243A"/>
+            <a:srgbClr val="F1F5F9"/>
           </a:solidFill>
           <a:ln/>
           <a:effectLst>
-            <a:outerShdw sx="100000" sy="100000" kx="0" ky="0" algn="bl" rotWithShape="0" blurRad="101600" dist="38100" dir="5400000">
+            <a:outerShdw sx="100000" sy="100000" kx="0" ky="0" algn="bl" rotWithShape="0" blurRad="76200" dist="25400" dir="5400000">
               <a:srgbClr val="000000">
-                <a:alpha val="35000"/>
+                <a:alpha val="12000"/>
               </a:srgbClr>
             </a:outerShdw>
           </a:effectLst>
@@ -5376,7 +5086,7 @@
             <a:r>
               <a:rPr lang="en-US" sz="1400" dirty="0">
                 <a:solidFill>
-                  <a:srgbClr val="E6EDF3"/>
+                  <a:srgbClr val="1F2937"/>
                 </a:solidFill>
                 <a:latin typeface="Calibri" pitchFamily="34" charset="0"/>
                 <a:ea typeface="Calibri" pitchFamily="34" charset="-122"/>
@@ -5397,7 +5107,7 @@
             <a:r>
               <a:rPr lang="en-US" sz="1400" dirty="0">
                 <a:solidFill>
-                  <a:srgbClr val="E6EDF3"/>
+                  <a:srgbClr val="1F2937"/>
                 </a:solidFill>
                 <a:latin typeface="Calibri" pitchFamily="34" charset="0"/>
                 <a:ea typeface="Calibri" pitchFamily="34" charset="-122"/>
@@ -5418,7 +5128,7 @@
             <a:r>
               <a:rPr lang="en-US" sz="1400" dirty="0">
                 <a:solidFill>
-                  <a:srgbClr val="E6EDF3"/>
+                  <a:srgbClr val="1F2937"/>
                 </a:solidFill>
                 <a:latin typeface="Calibri" pitchFamily="34" charset="0"/>
                 <a:ea typeface="Calibri" pitchFamily="34" charset="-122"/>
@@ -5439,7 +5149,7 @@
             <a:r>
               <a:rPr lang="en-US" sz="1400" dirty="0">
                 <a:solidFill>
-                  <a:srgbClr val="E6EDF3"/>
+                  <a:srgbClr val="1F2937"/>
                 </a:solidFill>
                 <a:latin typeface="Calibri" pitchFamily="34" charset="0"/>
                 <a:ea typeface="Calibri" pitchFamily="34" charset="-122"/>
@@ -5468,7 +5178,7 @@
             </a:avLst>
           </a:prstGeom>
           <a:solidFill>
-            <a:srgbClr val="1E2B45"/>
+            <a:srgbClr val="E8EDF3"/>
           </a:solidFill>
           <a:ln/>
         </p:spPr>
@@ -5539,7 +5249,7 @@
             <a:r>
               <a:rPr lang="en-US" sz="900" dirty="0">
                 <a:solidFill>
-                  <a:srgbClr val="94A3B8"/>
+                  <a:srgbClr val="64748B"/>
                 </a:solidFill>
                 <a:latin typeface="Calibri" pitchFamily="34" charset="0"/>
                 <a:ea typeface="Calibri" pitchFamily="34" charset="-122"/>
@@ -5551,38 +5261,9 @@
           </a:p>
         </p:txBody>
       </p:sp>
-      <p:sp>
-        <p:nvSpPr>
-          <p:cNvPr id="10" name="Shape 7"/>
-          <p:cNvSpPr/>
-          <p:nvPr/>
-        </p:nvSpPr>
-        <p:spPr>
-          <a:xfrm>
-            <a:off x="7772400" y="4590288"/>
-            <a:ext cx="969264" cy="475488"/>
-          </a:xfrm>
-          <a:prstGeom prst="roundRect">
-            <a:avLst>
-              <a:gd name="adj" fmla="val 11538"/>
-            </a:avLst>
-          </a:prstGeom>
-          <a:solidFill>
-            <a:srgbClr val="FFFFFF"/>
-          </a:solidFill>
-          <a:ln/>
-          <a:effectLst>
-            <a:outerShdw sx="100000" sy="100000" kx="0" ky="0" algn="bl" rotWithShape="0" blurRad="101600" dist="38100" dir="5400000">
-              <a:srgbClr val="000000">
-                <a:alpha val="35000"/>
-              </a:srgbClr>
-            </a:outerShdw>
-          </a:effectLst>
-        </p:spPr>
-      </p:sp>
       <p:pic>
         <p:nvPicPr>
-          <p:cNvPr id="11" name="Image 1" descr="/Users/pop7/Library/CloudStorage/OneDrive-MonsterConnectCo.,Ltd/Lecture/KOSEN69 - software-security/slides/pptx/assets/logo-small.png">    </p:cNvPr>
+          <p:cNvPr id="10" name="Image 1" descr="/Users/pop7/Library/CloudStorage/OneDrive-MonsterConnectCo.,Ltd/Lecture/KOSEN69 - software-security/slides/pptx/assets/logo-small.png">    </p:cNvPr>
           <p:cNvPicPr>
             <a:picLocks noChangeAspect="1"/>
           </p:cNvPicPr>
@@ -5596,7 +5277,7 @@
         </p:blipFill>
         <p:spPr>
           <a:xfrm>
-            <a:off x="7872984" y="4681728"/>
+            <a:off x="7882128" y="4700016"/>
             <a:ext cx="768096" cy="356616"/>
           </a:xfrm>
           <a:prstGeom prst="rect">
@@ -5618,7 +5299,7 @@
     <p:bg>
       <p:bgPr>
         <a:solidFill>
-          <a:srgbClr val="0E1726"/>
+          <a:srgbClr val="FFFFFF"/>
         </a:solidFill>
       </p:bgPr>
     </p:bg>
@@ -5655,9 +5336,9 @@
           </a:solidFill>
           <a:ln/>
           <a:effectLst>
-            <a:outerShdw sx="100000" sy="100000" kx="0" ky="0" algn="bl" rotWithShape="0" blurRad="101600" dist="38100" dir="5400000">
+            <a:outerShdw sx="100000" sy="100000" kx="0" ky="0" algn="bl" rotWithShape="0" blurRad="76200" dist="25400" dir="5400000">
               <a:srgbClr val="000000">
-                <a:alpha val="35000"/>
+                <a:alpha val="12000"/>
               </a:srgbClr>
             </a:outerShdw>
           </a:effectLst>
@@ -5714,7 +5395,7 @@
             <a:r>
               <a:rPr lang="en-US" sz="2600" b="1" dirty="0">
                 <a:solidFill>
-                  <a:srgbClr val="E6EDF3"/>
+                  <a:srgbClr val="1F2937"/>
                 </a:solidFill>
                 <a:latin typeface="Arial" pitchFamily="34" charset="0"/>
                 <a:ea typeface="Arial" pitchFamily="34" charset="-122"/>
@@ -5743,13 +5424,13 @@
             </a:avLst>
           </a:prstGeom>
           <a:solidFill>
-            <a:srgbClr val="18243A"/>
+            <a:srgbClr val="F1F5F9"/>
           </a:solidFill>
           <a:ln/>
           <a:effectLst>
-            <a:outerShdw sx="100000" sy="100000" kx="0" ky="0" algn="bl" rotWithShape="0" blurRad="101600" dist="38100" dir="5400000">
+            <a:outerShdw sx="100000" sy="100000" kx="0" ky="0" algn="bl" rotWithShape="0" blurRad="76200" dist="25400" dir="5400000">
               <a:srgbClr val="000000">
-                <a:alpha val="35000"/>
+                <a:alpha val="12000"/>
               </a:srgbClr>
             </a:outerShdw>
           </a:effectLst>
@@ -5786,7 +5467,7 @@
             <a:r>
               <a:rPr lang="en-US" sz="1400" dirty="0">
                 <a:solidFill>
-                  <a:srgbClr val="E6EDF3"/>
+                  <a:srgbClr val="1F2937"/>
                 </a:solidFill>
                 <a:latin typeface="Calibri" pitchFamily="34" charset="0"/>
                 <a:ea typeface="Calibri" pitchFamily="34" charset="-122"/>
@@ -5807,7 +5488,7 @@
             <a:r>
               <a:rPr lang="en-US" sz="1400" dirty="0">
                 <a:solidFill>
-                  <a:srgbClr val="E6EDF3"/>
+                  <a:srgbClr val="1F2937"/>
                 </a:solidFill>
                 <a:latin typeface="Calibri" pitchFamily="34" charset="0"/>
                 <a:ea typeface="Calibri" pitchFamily="34" charset="-122"/>
@@ -5828,7 +5509,7 @@
             <a:r>
               <a:rPr lang="en-US" sz="1400" dirty="0">
                 <a:solidFill>
-                  <a:srgbClr val="E6EDF3"/>
+                  <a:srgbClr val="1F2937"/>
                 </a:solidFill>
                 <a:latin typeface="Calibri" pitchFamily="34" charset="0"/>
                 <a:ea typeface="Calibri" pitchFamily="34" charset="-122"/>
@@ -5867,7 +5548,7 @@
             <a:r>
               <a:rPr lang="en-US" sz="900" dirty="0">
                 <a:solidFill>
-                  <a:srgbClr val="94A3B8"/>
+                  <a:srgbClr val="64748B"/>
                 </a:solidFill>
                 <a:latin typeface="Calibri" pitchFamily="34" charset="0"/>
                 <a:ea typeface="Calibri" pitchFamily="34" charset="-122"/>
@@ -5879,38 +5560,9 @@
           </a:p>
         </p:txBody>
       </p:sp>
-      <p:sp>
-        <p:nvSpPr>
-          <p:cNvPr id="8" name="Shape 5"/>
-          <p:cNvSpPr/>
-          <p:nvPr/>
-        </p:nvSpPr>
-        <p:spPr>
-          <a:xfrm>
-            <a:off x="7772400" y="4590288"/>
-            <a:ext cx="969264" cy="475488"/>
-          </a:xfrm>
-          <a:prstGeom prst="roundRect">
-            <a:avLst>
-              <a:gd name="adj" fmla="val 11538"/>
-            </a:avLst>
-          </a:prstGeom>
-          <a:solidFill>
-            <a:srgbClr val="FFFFFF"/>
-          </a:solidFill>
-          <a:ln/>
-          <a:effectLst>
-            <a:outerShdw sx="100000" sy="100000" kx="0" ky="0" algn="bl" rotWithShape="0" blurRad="101600" dist="38100" dir="5400000">
-              <a:srgbClr val="000000">
-                <a:alpha val="35000"/>
-              </a:srgbClr>
-            </a:outerShdw>
-          </a:effectLst>
-        </p:spPr>
-      </p:sp>
       <p:pic>
         <p:nvPicPr>
-          <p:cNvPr id="9" name="Image 1" descr="/Users/pop7/Library/CloudStorage/OneDrive-MonsterConnectCo.,Ltd/Lecture/KOSEN69 - software-security/slides/pptx/assets/logo-small.png">    </p:cNvPr>
+          <p:cNvPr id="8" name="Image 1" descr="/Users/pop7/Library/CloudStorage/OneDrive-MonsterConnectCo.,Ltd/Lecture/KOSEN69 - software-security/slides/pptx/assets/logo-small.png">    </p:cNvPr>
           <p:cNvPicPr>
             <a:picLocks noChangeAspect="1"/>
           </p:cNvPicPr>
@@ -5924,7 +5576,7 @@
         </p:blipFill>
         <p:spPr>
           <a:xfrm>
-            <a:off x="7872984" y="4681728"/>
+            <a:off x="7882128" y="4700016"/>
             <a:ext cx="768096" cy="356616"/>
           </a:xfrm>
           <a:prstGeom prst="rect">
@@ -5946,7 +5598,7 @@
     <p:bg>
       <p:bgPr>
         <a:solidFill>
-          <a:srgbClr val="0E1726"/>
+          <a:srgbClr val="FFFFFF"/>
         </a:solidFill>
       </p:bgPr>
     </p:bg>
@@ -5983,9 +5635,9 @@
           </a:solidFill>
           <a:ln/>
           <a:effectLst>
-            <a:outerShdw sx="100000" sy="100000" kx="0" ky="0" algn="bl" rotWithShape="0" blurRad="101600" dist="38100" dir="5400000">
+            <a:outerShdw sx="100000" sy="100000" kx="0" ky="0" algn="bl" rotWithShape="0" blurRad="76200" dist="25400" dir="5400000">
               <a:srgbClr val="000000">
-                <a:alpha val="35000"/>
+                <a:alpha val="12000"/>
               </a:srgbClr>
             </a:outerShdw>
           </a:effectLst>
@@ -6042,7 +5694,7 @@
             <a:r>
               <a:rPr lang="en-US" sz="2600" b="1" dirty="0">
                 <a:solidFill>
-                  <a:srgbClr val="E6EDF3"/>
+                  <a:srgbClr val="1F2937"/>
                 </a:solidFill>
                 <a:latin typeface="Arial" pitchFamily="34" charset="0"/>
                 <a:ea typeface="Arial" pitchFamily="34" charset="-122"/>
@@ -6071,13 +5723,13 @@
             </a:avLst>
           </a:prstGeom>
           <a:solidFill>
-            <a:srgbClr val="18243A"/>
+            <a:srgbClr val="F1F5F9"/>
           </a:solidFill>
           <a:ln/>
           <a:effectLst>
-            <a:outerShdw sx="100000" sy="100000" kx="0" ky="0" algn="bl" rotWithShape="0" blurRad="101600" dist="38100" dir="5400000">
+            <a:outerShdw sx="100000" sy="100000" kx="0" ky="0" algn="bl" rotWithShape="0" blurRad="76200" dist="25400" dir="5400000">
               <a:srgbClr val="000000">
-                <a:alpha val="35000"/>
+                <a:alpha val="12000"/>
               </a:srgbClr>
             </a:outerShdw>
           </a:effectLst>
@@ -6114,7 +5766,7 @@
             <a:r>
               <a:rPr lang="en-US" sz="1400" dirty="0">
                 <a:solidFill>
-                  <a:srgbClr val="E6EDF3"/>
+                  <a:srgbClr val="1F2937"/>
                 </a:solidFill>
                 <a:latin typeface="Calibri" pitchFamily="34" charset="0"/>
                 <a:ea typeface="Calibri" pitchFamily="34" charset="-122"/>
@@ -6135,7 +5787,7 @@
             <a:r>
               <a:rPr lang="en-US" sz="1400" dirty="0">
                 <a:solidFill>
-                  <a:srgbClr val="E6EDF3"/>
+                  <a:srgbClr val="1F2937"/>
                 </a:solidFill>
                 <a:latin typeface="Calibri" pitchFamily="34" charset="0"/>
                 <a:ea typeface="Calibri" pitchFamily="34" charset="-122"/>
@@ -6156,7 +5808,7 @@
             <a:r>
               <a:rPr lang="en-US" sz="1400" dirty="0">
                 <a:solidFill>
-                  <a:srgbClr val="E6EDF3"/>
+                  <a:srgbClr val="1F2937"/>
                 </a:solidFill>
                 <a:latin typeface="Calibri" pitchFamily="34" charset="0"/>
                 <a:ea typeface="Calibri" pitchFamily="34" charset="-122"/>
@@ -6177,7 +5829,7 @@
             <a:r>
               <a:rPr lang="en-US" sz="1400" dirty="0">
                 <a:solidFill>
-                  <a:srgbClr val="E6EDF3"/>
+                  <a:srgbClr val="1F2937"/>
                 </a:solidFill>
                 <a:latin typeface="Calibri" pitchFamily="34" charset="0"/>
                 <a:ea typeface="Calibri" pitchFamily="34" charset="-122"/>
@@ -6216,7 +5868,7 @@
             <a:r>
               <a:rPr lang="en-US" sz="900" dirty="0">
                 <a:solidFill>
-                  <a:srgbClr val="94A3B8"/>
+                  <a:srgbClr val="64748B"/>
                 </a:solidFill>
                 <a:latin typeface="Calibri" pitchFamily="34" charset="0"/>
                 <a:ea typeface="Calibri" pitchFamily="34" charset="-122"/>
@@ -6228,38 +5880,9 @@
           </a:p>
         </p:txBody>
       </p:sp>
-      <p:sp>
-        <p:nvSpPr>
-          <p:cNvPr id="8" name="Shape 5"/>
-          <p:cNvSpPr/>
-          <p:nvPr/>
-        </p:nvSpPr>
-        <p:spPr>
-          <a:xfrm>
-            <a:off x="7772400" y="4590288"/>
-            <a:ext cx="969264" cy="475488"/>
-          </a:xfrm>
-          <a:prstGeom prst="roundRect">
-            <a:avLst>
-              <a:gd name="adj" fmla="val 11538"/>
-            </a:avLst>
-          </a:prstGeom>
-          <a:solidFill>
-            <a:srgbClr val="FFFFFF"/>
-          </a:solidFill>
-          <a:ln/>
-          <a:effectLst>
-            <a:outerShdw sx="100000" sy="100000" kx="0" ky="0" algn="bl" rotWithShape="0" blurRad="101600" dist="38100" dir="5400000">
-              <a:srgbClr val="000000">
-                <a:alpha val="35000"/>
-              </a:srgbClr>
-            </a:outerShdw>
-          </a:effectLst>
-        </p:spPr>
-      </p:sp>
       <p:pic>
         <p:nvPicPr>
-          <p:cNvPr id="9" name="Image 1" descr="/Users/pop7/Library/CloudStorage/OneDrive-MonsterConnectCo.,Ltd/Lecture/KOSEN69 - software-security/slides/pptx/assets/logo-small.png">    </p:cNvPr>
+          <p:cNvPr id="8" name="Image 1" descr="/Users/pop7/Library/CloudStorage/OneDrive-MonsterConnectCo.,Ltd/Lecture/KOSEN69 - software-security/slides/pptx/assets/logo-small.png">    </p:cNvPr>
           <p:cNvPicPr>
             <a:picLocks noChangeAspect="1"/>
           </p:cNvPicPr>
@@ -6273,7 +5896,7 @@
         </p:blipFill>
         <p:spPr>
           <a:xfrm>
-            <a:off x="7872984" y="4681728"/>
+            <a:off x="7882128" y="4700016"/>
             <a:ext cx="768096" cy="356616"/>
           </a:xfrm>
           <a:prstGeom prst="rect">
@@ -6295,7 +5918,7 @@
     <p:bg>
       <p:bgPr>
         <a:solidFill>
-          <a:srgbClr val="0E1726"/>
+          <a:srgbClr val="FFFFFF"/>
         </a:solidFill>
       </p:bgPr>
     </p:bg>
@@ -6332,9 +5955,9 @@
           </a:solidFill>
           <a:ln/>
           <a:effectLst>
-            <a:outerShdw sx="100000" sy="100000" kx="0" ky="0" algn="bl" rotWithShape="0" blurRad="101600" dist="38100" dir="5400000">
+            <a:outerShdw sx="100000" sy="100000" kx="0" ky="0" algn="bl" rotWithShape="0" blurRad="76200" dist="25400" dir="5400000">
               <a:srgbClr val="000000">
-                <a:alpha val="35000"/>
+                <a:alpha val="12000"/>
               </a:srgbClr>
             </a:outerShdw>
           </a:effectLst>
@@ -6391,7 +6014,7 @@
             <a:r>
               <a:rPr lang="en-US" sz="2600" b="1" dirty="0">
                 <a:solidFill>
-                  <a:srgbClr val="E6EDF3"/>
+                  <a:srgbClr val="1F2937"/>
                 </a:solidFill>
                 <a:latin typeface="Arial" pitchFamily="34" charset="0"/>
                 <a:ea typeface="Arial" pitchFamily="34" charset="-122"/>
@@ -6445,7 +6068,7 @@
                   <a:tcPr marL="76200" marR="76200" marT="38100" marB="38100" anchor="ctr">
                     <a:lnL w="12700" cap="flat" cmpd="sng" algn="ctr">
                       <a:solidFill>
-                        <a:srgbClr val="0E1726"/>
+                        <a:srgbClr val="FFFFFF"/>
                       </a:solidFill>
                       <a:prstDash val="solid"/>
                       <a:round/>
@@ -6454,7 +6077,7 @@
                     </a:lnL>
                     <a:lnR w="12700" cap="flat" cmpd="sng" algn="ctr">
                       <a:solidFill>
-                        <a:srgbClr val="0E1726"/>
+                        <a:srgbClr val="FFFFFF"/>
                       </a:solidFill>
                       <a:prstDash val="solid"/>
                       <a:round/>
@@ -6463,7 +6086,7 @@
                     </a:lnR>
                     <a:lnT w="12700" cap="flat" cmpd="sng" algn="ctr">
                       <a:solidFill>
-                        <a:srgbClr val="0E1726"/>
+                        <a:srgbClr val="FFFFFF"/>
                       </a:solidFill>
                       <a:prstDash val="solid"/>
                       <a:round/>
@@ -6472,7 +6095,7 @@
                     </a:lnT>
                     <a:lnB w="12700" cap="flat" cmpd="sng" algn="ctr">
                       <a:solidFill>
-                        <a:srgbClr val="0E1726"/>
+                        <a:srgbClr val="FFFFFF"/>
                       </a:solidFill>
                       <a:prstDash val="solid"/>
                       <a:round/>
@@ -6506,7 +6129,7 @@
                   <a:tcPr marL="76200" marR="76200" marT="38100" marB="38100" anchor="ctr">
                     <a:lnL w="12700" cap="flat" cmpd="sng" algn="ctr">
                       <a:solidFill>
-                        <a:srgbClr val="0E1726"/>
+                        <a:srgbClr val="FFFFFF"/>
                       </a:solidFill>
                       <a:prstDash val="solid"/>
                       <a:round/>
@@ -6515,7 +6138,7 @@
                     </a:lnL>
                     <a:lnR w="12700" cap="flat" cmpd="sng" algn="ctr">
                       <a:solidFill>
-                        <a:srgbClr val="0E1726"/>
+                        <a:srgbClr val="FFFFFF"/>
                       </a:solidFill>
                       <a:prstDash val="solid"/>
                       <a:round/>
@@ -6524,7 +6147,7 @@
                     </a:lnR>
                     <a:lnT w="12700" cap="flat" cmpd="sng" algn="ctr">
                       <a:solidFill>
-                        <a:srgbClr val="0E1726"/>
+                        <a:srgbClr val="FFFFFF"/>
                       </a:solidFill>
                       <a:prstDash val="solid"/>
                       <a:round/>
@@ -6533,7 +6156,7 @@
                     </a:lnT>
                     <a:lnB w="12700" cap="flat" cmpd="sng" algn="ctr">
                       <a:solidFill>
-                        <a:srgbClr val="0E1726"/>
+                        <a:srgbClr val="FFFFFF"/>
                       </a:solidFill>
                       <a:prstDash val="solid"/>
                       <a:round/>
@@ -6567,7 +6190,7 @@
                   <a:tcPr marL="76200" marR="76200" marT="38100" marB="38100" anchor="ctr">
                     <a:lnL w="12700" cap="flat" cmpd="sng" algn="ctr">
                       <a:solidFill>
-                        <a:srgbClr val="0E1726"/>
+                        <a:srgbClr val="FFFFFF"/>
                       </a:solidFill>
                       <a:prstDash val="solid"/>
                       <a:round/>
@@ -6576,7 +6199,7 @@
                     </a:lnL>
                     <a:lnR w="12700" cap="flat" cmpd="sng" algn="ctr">
                       <a:solidFill>
-                        <a:srgbClr val="0E1726"/>
+                        <a:srgbClr val="FFFFFF"/>
                       </a:solidFill>
                       <a:prstDash val="solid"/>
                       <a:round/>
@@ -6585,7 +6208,7 @@
                     </a:lnR>
                     <a:lnT w="12700" cap="flat" cmpd="sng" algn="ctr">
                       <a:solidFill>
-                        <a:srgbClr val="0E1726"/>
+                        <a:srgbClr val="FFFFFF"/>
                       </a:solidFill>
                       <a:prstDash val="solid"/>
                       <a:round/>
@@ -6594,7 +6217,7 @@
                     </a:lnT>
                     <a:lnB w="12700" cap="flat" cmpd="sng" algn="ctr">
                       <a:solidFill>
-                        <a:srgbClr val="0E1726"/>
+                        <a:srgbClr val="FFFFFF"/>
                       </a:solidFill>
                       <a:prstDash val="solid"/>
                       <a:round/>
@@ -6619,7 +6242,7 @@
                       <a:r>
                         <a:rPr lang="en-US" sz="1200" dirty="0">
                           <a:solidFill>
-                            <a:srgbClr val="E6EDF3"/>
+                            <a:srgbClr val="1F2937"/>
                           </a:solidFill>
                         </a:rPr>
                         <a:t>Alert fired</a:t>
@@ -6630,7 +6253,7 @@
                   <a:tcPr marL="76200" marR="76200" marT="38100" marB="38100" anchor="ctr">
                     <a:lnL w="12700" cap="flat" cmpd="sng" algn="ctr">
                       <a:solidFill>
-                        <a:srgbClr val="0E1726"/>
+                        <a:srgbClr val="FFFFFF"/>
                       </a:solidFill>
                       <a:prstDash val="solid"/>
                       <a:round/>
@@ -6639,7 +6262,7 @@
                     </a:lnL>
                     <a:lnR w="12700" cap="flat" cmpd="sng" algn="ctr">
                       <a:solidFill>
-                        <a:srgbClr val="0E1726"/>
+                        <a:srgbClr val="FFFFFF"/>
                       </a:solidFill>
                       <a:prstDash val="solid"/>
                       <a:round/>
@@ -6648,7 +6271,7 @@
                     </a:lnR>
                     <a:lnT w="12700" cap="flat" cmpd="sng" algn="ctr">
                       <a:solidFill>
-                        <a:srgbClr val="0E1726"/>
+                        <a:srgbClr val="FFFFFF"/>
                       </a:solidFill>
                       <a:prstDash val="solid"/>
                       <a:round/>
@@ -6657,7 +6280,7 @@
                     </a:lnT>
                     <a:lnB w="12700" cap="flat" cmpd="sng" algn="ctr">
                       <a:solidFill>
-                        <a:srgbClr val="0E1726"/>
+                        <a:srgbClr val="FFFFFF"/>
                       </a:solidFill>
                       <a:prstDash val="solid"/>
                       <a:round/>
@@ -6665,7 +6288,7 @@
                       <a:tailEnd type="none" w="med" len="med"/>
                     </a:lnB>
                     <a:solidFill>
-                      <a:srgbClr val="18243A"/>
+                      <a:srgbClr val="F1F5F9"/>
                     </a:solidFill>
                   </a:tcPr>
                 </a:tc>
@@ -6680,7 +6303,7 @@
                       <a:r>
                         <a:rPr lang="en-US" sz="1200" dirty="0">
                           <a:solidFill>
-                            <a:srgbClr val="E6EDF3"/>
+                            <a:srgbClr val="1F2937"/>
                           </a:solidFill>
                         </a:rPr>
                         <a:t>True positive ✅</a:t>
@@ -6691,7 +6314,7 @@
                   <a:tcPr marL="76200" marR="76200" marT="38100" marB="38100" anchor="ctr">
                     <a:lnL w="12700" cap="flat" cmpd="sng" algn="ctr">
                       <a:solidFill>
-                        <a:srgbClr val="0E1726"/>
+                        <a:srgbClr val="FFFFFF"/>
                       </a:solidFill>
                       <a:prstDash val="solid"/>
                       <a:round/>
@@ -6700,7 +6323,7 @@
                     </a:lnL>
                     <a:lnR w="12700" cap="flat" cmpd="sng" algn="ctr">
                       <a:solidFill>
-                        <a:srgbClr val="0E1726"/>
+                        <a:srgbClr val="FFFFFF"/>
                       </a:solidFill>
                       <a:prstDash val="solid"/>
                       <a:round/>
@@ -6709,7 +6332,7 @@
                     </a:lnR>
                     <a:lnT w="12700" cap="flat" cmpd="sng" algn="ctr">
                       <a:solidFill>
-                        <a:srgbClr val="0E1726"/>
+                        <a:srgbClr val="FFFFFF"/>
                       </a:solidFill>
                       <a:prstDash val="solid"/>
                       <a:round/>
@@ -6718,7 +6341,7 @@
                     </a:lnT>
                     <a:lnB w="12700" cap="flat" cmpd="sng" algn="ctr">
                       <a:solidFill>
-                        <a:srgbClr val="0E1726"/>
+                        <a:srgbClr val="FFFFFF"/>
                       </a:solidFill>
                       <a:prstDash val="solid"/>
                       <a:round/>
@@ -6726,7 +6349,7 @@
                       <a:tailEnd type="none" w="med" len="med"/>
                     </a:lnB>
                     <a:solidFill>
-                      <a:srgbClr val="18243A"/>
+                      <a:srgbClr val="F1F5F9"/>
                     </a:solidFill>
                   </a:tcPr>
                 </a:tc>
@@ -6741,7 +6364,7 @@
                       <a:r>
                         <a:rPr lang="en-US" sz="1200" dirty="0">
                           <a:solidFill>
-                            <a:srgbClr val="E6EDF3"/>
+                            <a:srgbClr val="1F2937"/>
                           </a:solidFill>
                         </a:rPr>
                         <a:t>False positive</a:t>
@@ -6752,7 +6375,7 @@
                   <a:tcPr marL="76200" marR="76200" marT="38100" marB="38100" anchor="ctr">
                     <a:lnL w="12700" cap="flat" cmpd="sng" algn="ctr">
                       <a:solidFill>
-                        <a:srgbClr val="0E1726"/>
+                        <a:srgbClr val="FFFFFF"/>
                       </a:solidFill>
                       <a:prstDash val="solid"/>
                       <a:round/>
@@ -6761,7 +6384,7 @@
                     </a:lnL>
                     <a:lnR w="12700" cap="flat" cmpd="sng" algn="ctr">
                       <a:solidFill>
-                        <a:srgbClr val="0E1726"/>
+                        <a:srgbClr val="FFFFFF"/>
                       </a:solidFill>
                       <a:prstDash val="solid"/>
                       <a:round/>
@@ -6770,7 +6393,7 @@
                     </a:lnR>
                     <a:lnT w="12700" cap="flat" cmpd="sng" algn="ctr">
                       <a:solidFill>
-                        <a:srgbClr val="0E1726"/>
+                        <a:srgbClr val="FFFFFF"/>
                       </a:solidFill>
                       <a:prstDash val="solid"/>
                       <a:round/>
@@ -6779,7 +6402,7 @@
                     </a:lnT>
                     <a:lnB w="12700" cap="flat" cmpd="sng" algn="ctr">
                       <a:solidFill>
-                        <a:srgbClr val="0E1726"/>
+                        <a:srgbClr val="FFFFFF"/>
                       </a:solidFill>
                       <a:prstDash val="solid"/>
                       <a:round/>
@@ -6787,7 +6410,7 @@
                       <a:tailEnd type="none" w="med" len="med"/>
                     </a:lnB>
                     <a:solidFill>
-                      <a:srgbClr val="18243A"/>
+                      <a:srgbClr val="F1F5F9"/>
                     </a:solidFill>
                   </a:tcPr>
                 </a:tc>
@@ -6804,7 +6427,7 @@
                       <a:r>
                         <a:rPr lang="en-US" sz="1200" dirty="0">
                           <a:solidFill>
-                            <a:srgbClr val="E6EDF3"/>
+                            <a:srgbClr val="1F2937"/>
                           </a:solidFill>
                         </a:rPr>
                         <a:t>No alert</a:t>
@@ -6815,7 +6438,7 @@
                   <a:tcPr marL="76200" marR="76200" marT="38100" marB="38100" anchor="ctr">
                     <a:lnL w="12700" cap="flat" cmpd="sng" algn="ctr">
                       <a:solidFill>
-                        <a:srgbClr val="0E1726"/>
+                        <a:srgbClr val="FFFFFF"/>
                       </a:solidFill>
                       <a:prstDash val="solid"/>
                       <a:round/>
@@ -6824,7 +6447,7 @@
                     </a:lnL>
                     <a:lnR w="12700" cap="flat" cmpd="sng" algn="ctr">
                       <a:solidFill>
-                        <a:srgbClr val="0E1726"/>
+                        <a:srgbClr val="FFFFFF"/>
                       </a:solidFill>
                       <a:prstDash val="solid"/>
                       <a:round/>
@@ -6833,7 +6456,7 @@
                     </a:lnR>
                     <a:lnT w="12700" cap="flat" cmpd="sng" algn="ctr">
                       <a:solidFill>
-                        <a:srgbClr val="0E1726"/>
+                        <a:srgbClr val="FFFFFF"/>
                       </a:solidFill>
                       <a:prstDash val="solid"/>
                       <a:round/>
@@ -6842,7 +6465,7 @@
                     </a:lnT>
                     <a:lnB w="12700" cap="flat" cmpd="sng" algn="ctr">
                       <a:solidFill>
-                        <a:srgbClr val="0E1726"/>
+                        <a:srgbClr val="FFFFFF"/>
                       </a:solidFill>
                       <a:prstDash val="solid"/>
                       <a:round/>
@@ -6850,7 +6473,7 @@
                       <a:tailEnd type="none" w="med" len="med"/>
                     </a:lnB>
                     <a:solidFill>
-                      <a:srgbClr val="1E2B45"/>
+                      <a:srgbClr val="E8EDF3"/>
                     </a:solidFill>
                   </a:tcPr>
                 </a:tc>
@@ -6865,7 +6488,7 @@
                       <a:r>
                         <a:rPr lang="en-US" sz="1200" dirty="0">
                           <a:solidFill>
-                            <a:srgbClr val="E6EDF3"/>
+                            <a:srgbClr val="1F2937"/>
                           </a:solidFill>
                         </a:rPr>
                         <a:t>False negative 💀</a:t>
@@ -6876,7 +6499,7 @@
                   <a:tcPr marL="76200" marR="76200" marT="38100" marB="38100" anchor="ctr">
                     <a:lnL w="12700" cap="flat" cmpd="sng" algn="ctr">
                       <a:solidFill>
-                        <a:srgbClr val="0E1726"/>
+                        <a:srgbClr val="FFFFFF"/>
                       </a:solidFill>
                       <a:prstDash val="solid"/>
                       <a:round/>
@@ -6885,7 +6508,7 @@
                     </a:lnL>
                     <a:lnR w="12700" cap="flat" cmpd="sng" algn="ctr">
                       <a:solidFill>
-                        <a:srgbClr val="0E1726"/>
+                        <a:srgbClr val="FFFFFF"/>
                       </a:solidFill>
                       <a:prstDash val="solid"/>
                       <a:round/>
@@ -6894,7 +6517,7 @@
                     </a:lnR>
                     <a:lnT w="12700" cap="flat" cmpd="sng" algn="ctr">
                       <a:solidFill>
-                        <a:srgbClr val="0E1726"/>
+                        <a:srgbClr val="FFFFFF"/>
                       </a:solidFill>
                       <a:prstDash val="solid"/>
                       <a:round/>
@@ -6903,7 +6526,7 @@
                     </a:lnT>
                     <a:lnB w="12700" cap="flat" cmpd="sng" algn="ctr">
                       <a:solidFill>
-                        <a:srgbClr val="0E1726"/>
+                        <a:srgbClr val="FFFFFF"/>
                       </a:solidFill>
                       <a:prstDash val="solid"/>
                       <a:round/>
@@ -6911,7 +6534,7 @@
                       <a:tailEnd type="none" w="med" len="med"/>
                     </a:lnB>
                     <a:solidFill>
-                      <a:srgbClr val="1E2B45"/>
+                      <a:srgbClr val="E8EDF3"/>
                     </a:solidFill>
                   </a:tcPr>
                 </a:tc>
@@ -6926,7 +6549,7 @@
                       <a:r>
                         <a:rPr lang="en-US" sz="1200" dirty="0">
                           <a:solidFill>
-                            <a:srgbClr val="E6EDF3"/>
+                            <a:srgbClr val="1F2937"/>
                           </a:solidFill>
                         </a:rPr>
                         <a:t>True negative</a:t>
@@ -6937,7 +6560,7 @@
                   <a:tcPr marL="76200" marR="76200" marT="38100" marB="38100" anchor="ctr">
                     <a:lnL w="12700" cap="flat" cmpd="sng" algn="ctr">
                       <a:solidFill>
-                        <a:srgbClr val="0E1726"/>
+                        <a:srgbClr val="FFFFFF"/>
                       </a:solidFill>
                       <a:prstDash val="solid"/>
                       <a:round/>
@@ -6946,7 +6569,7 @@
                     </a:lnL>
                     <a:lnR w="12700" cap="flat" cmpd="sng" algn="ctr">
                       <a:solidFill>
-                        <a:srgbClr val="0E1726"/>
+                        <a:srgbClr val="FFFFFF"/>
                       </a:solidFill>
                       <a:prstDash val="solid"/>
                       <a:round/>
@@ -6955,7 +6578,7 @@
                     </a:lnR>
                     <a:lnT w="12700" cap="flat" cmpd="sng" algn="ctr">
                       <a:solidFill>
-                        <a:srgbClr val="0E1726"/>
+                        <a:srgbClr val="FFFFFF"/>
                       </a:solidFill>
                       <a:prstDash val="solid"/>
                       <a:round/>
@@ -6964,7 +6587,7 @@
                     </a:lnT>
                     <a:lnB w="12700" cap="flat" cmpd="sng" algn="ctr">
                       <a:solidFill>
-                        <a:srgbClr val="0E1726"/>
+                        <a:srgbClr val="FFFFFF"/>
                       </a:solidFill>
                       <a:prstDash val="solid"/>
                       <a:round/>
@@ -6972,7 +6595,7 @@
                       <a:tailEnd type="none" w="med" len="med"/>
                     </a:lnB>
                     <a:solidFill>
-                      <a:srgbClr val="1E2B45"/>
+                      <a:srgbClr val="E8EDF3"/>
                     </a:solidFill>
                   </a:tcPr>
                 </a:tc>
@@ -6998,13 +6621,13 @@
             </a:avLst>
           </a:prstGeom>
           <a:solidFill>
-            <a:srgbClr val="18243A"/>
+            <a:srgbClr val="F1F5F9"/>
           </a:solidFill>
           <a:ln/>
           <a:effectLst>
-            <a:outerShdw sx="100000" sy="100000" kx="0" ky="0" algn="bl" rotWithShape="0" blurRad="101600" dist="38100" dir="5400000">
+            <a:outerShdw sx="100000" sy="100000" kx="0" ky="0" algn="bl" rotWithShape="0" blurRad="76200" dist="25400" dir="5400000">
               <a:srgbClr val="000000">
-                <a:alpha val="35000"/>
+                <a:alpha val="12000"/>
               </a:srgbClr>
             </a:outerShdw>
           </a:effectLst>
@@ -7041,7 +6664,7 @@
             <a:r>
               <a:rPr lang="en-US" sz="1400" dirty="0">
                 <a:solidFill>
-                  <a:srgbClr val="E6EDF3"/>
+                  <a:srgbClr val="1F2937"/>
                 </a:solidFill>
                 <a:latin typeface="Calibri" pitchFamily="34" charset="0"/>
                 <a:ea typeface="Calibri" pitchFamily="34" charset="-122"/>
@@ -7062,7 +6685,7 @@
             <a:r>
               <a:rPr lang="en-US" sz="1400" dirty="0">
                 <a:solidFill>
-                  <a:srgbClr val="E6EDF3"/>
+                  <a:srgbClr val="1F2937"/>
                 </a:solidFill>
                 <a:latin typeface="Calibri" pitchFamily="34" charset="0"/>
                 <a:ea typeface="Calibri" pitchFamily="34" charset="-122"/>
@@ -7101,7 +6724,7 @@
             <a:r>
               <a:rPr lang="en-US" sz="900" dirty="0">
                 <a:solidFill>
-                  <a:srgbClr val="94A3B8"/>
+                  <a:srgbClr val="64748B"/>
                 </a:solidFill>
                 <a:latin typeface="Calibri" pitchFamily="34" charset="0"/>
                 <a:ea typeface="Calibri" pitchFamily="34" charset="-122"/>
@@ -7113,38 +6736,9 @@
           </a:p>
         </p:txBody>
       </p:sp>
-      <p:sp>
-        <p:nvSpPr>
-          <p:cNvPr id="9" name="Shape 5"/>
-          <p:cNvSpPr/>
-          <p:nvPr/>
-        </p:nvSpPr>
-        <p:spPr>
-          <a:xfrm>
-            <a:off x="7772400" y="4590288"/>
-            <a:ext cx="969264" cy="475488"/>
-          </a:xfrm>
-          <a:prstGeom prst="roundRect">
-            <a:avLst>
-              <a:gd name="adj" fmla="val 11538"/>
-            </a:avLst>
-          </a:prstGeom>
-          <a:solidFill>
-            <a:srgbClr val="FFFFFF"/>
-          </a:solidFill>
-          <a:ln/>
-          <a:effectLst>
-            <a:outerShdw sx="100000" sy="100000" kx="0" ky="0" algn="bl" rotWithShape="0" blurRad="101600" dist="38100" dir="5400000">
-              <a:srgbClr val="000000">
-                <a:alpha val="35000"/>
-              </a:srgbClr>
-            </a:outerShdw>
-          </a:effectLst>
-        </p:spPr>
-      </p:sp>
       <p:pic>
         <p:nvPicPr>
-          <p:cNvPr id="10" name="Image 1" descr="/Users/pop7/Library/CloudStorage/OneDrive-MonsterConnectCo.,Ltd/Lecture/KOSEN69 - software-security/slides/pptx/assets/logo-small.png">    </p:cNvPr>
+          <p:cNvPr id="9" name="Image 1" descr="/Users/pop7/Library/CloudStorage/OneDrive-MonsterConnectCo.,Ltd/Lecture/KOSEN69 - software-security/slides/pptx/assets/logo-small.png">    </p:cNvPr>
           <p:cNvPicPr>
             <a:picLocks noChangeAspect="1"/>
           </p:cNvPicPr>
@@ -7158,7 +6752,7 @@
         </p:blipFill>
         <p:spPr>
           <a:xfrm>
-            <a:off x="7872984" y="4681728"/>
+            <a:off x="7882128" y="4700016"/>
             <a:ext cx="768096" cy="356616"/>
           </a:xfrm>
           <a:prstGeom prst="rect">
@@ -7180,7 +6774,7 @@
     <p:bg>
       <p:bgPr>
         <a:solidFill>
-          <a:srgbClr val="0E1726"/>
+          <a:srgbClr val="FFFFFF"/>
         </a:solidFill>
       </p:bgPr>
     </p:bg>
@@ -7217,9 +6811,9 @@
           </a:solidFill>
           <a:ln/>
           <a:effectLst>
-            <a:outerShdw sx="100000" sy="100000" kx="0" ky="0" algn="bl" rotWithShape="0" blurRad="101600" dist="38100" dir="5400000">
+            <a:outerShdw sx="100000" sy="100000" kx="0" ky="0" algn="bl" rotWithShape="0" blurRad="76200" dist="25400" dir="5400000">
               <a:srgbClr val="000000">
-                <a:alpha val="35000"/>
+                <a:alpha val="12000"/>
               </a:srgbClr>
             </a:outerShdw>
           </a:effectLst>
@@ -7276,7 +6870,7 @@
             <a:r>
               <a:rPr lang="en-US" sz="2600" b="1" dirty="0">
                 <a:solidFill>
-                  <a:srgbClr val="E6EDF3"/>
+                  <a:srgbClr val="1F2937"/>
                 </a:solidFill>
                 <a:latin typeface="Arial" pitchFamily="34" charset="0"/>
                 <a:ea typeface="Arial" pitchFamily="34" charset="-122"/>
@@ -7315,7 +6909,7 @@
             <a:r>
               <a:rPr lang="en-US" sz="1400" dirty="0">
                 <a:solidFill>
-                  <a:srgbClr val="E6EDF3"/>
+                  <a:srgbClr val="1F2937"/>
                 </a:solidFill>
                 <a:latin typeface="Calibri" pitchFamily="34" charset="0"/>
                 <a:ea typeface="Calibri" pitchFamily="34" charset="-122"/>
@@ -7344,13 +6938,13 @@
             </a:avLst>
           </a:prstGeom>
           <a:solidFill>
-            <a:srgbClr val="18243A"/>
+            <a:srgbClr val="F1F5F9"/>
           </a:solidFill>
           <a:ln/>
           <a:effectLst>
-            <a:outerShdw sx="100000" sy="100000" kx="0" ky="0" algn="bl" rotWithShape="0" blurRad="101600" dist="38100" dir="5400000">
+            <a:outerShdw sx="100000" sy="100000" kx="0" ky="0" algn="bl" rotWithShape="0" blurRad="76200" dist="25400" dir="5400000">
               <a:srgbClr val="000000">
-                <a:alpha val="35000"/>
+                <a:alpha val="12000"/>
               </a:srgbClr>
             </a:outerShdw>
           </a:effectLst>
@@ -7387,7 +6981,7 @@
             <a:r>
               <a:rPr lang="en-US" sz="1400" dirty="0">
                 <a:solidFill>
-                  <a:srgbClr val="E6EDF3"/>
+                  <a:srgbClr val="1F2937"/>
                 </a:solidFill>
                 <a:latin typeface="Calibri" pitchFamily="34" charset="0"/>
                 <a:ea typeface="Calibri" pitchFamily="34" charset="-122"/>
@@ -7408,7 +7002,7 @@
             <a:r>
               <a:rPr lang="en-US" sz="1400" dirty="0">
                 <a:solidFill>
-                  <a:srgbClr val="E6EDF3"/>
+                  <a:srgbClr val="1F2937"/>
                 </a:solidFill>
                 <a:latin typeface="Calibri" pitchFamily="34" charset="0"/>
                 <a:ea typeface="Calibri" pitchFamily="34" charset="-122"/>
@@ -7447,7 +7041,7 @@
             <a:r>
               <a:rPr lang="en-US" sz="900" dirty="0">
                 <a:solidFill>
-                  <a:srgbClr val="94A3B8"/>
+                  <a:srgbClr val="64748B"/>
                 </a:solidFill>
                 <a:latin typeface="Calibri" pitchFamily="34" charset="0"/>
                 <a:ea typeface="Calibri" pitchFamily="34" charset="-122"/>
@@ -7459,38 +7053,9 @@
           </a:p>
         </p:txBody>
       </p:sp>
-      <p:sp>
-        <p:nvSpPr>
-          <p:cNvPr id="9" name="Shape 6"/>
-          <p:cNvSpPr/>
-          <p:nvPr/>
-        </p:nvSpPr>
-        <p:spPr>
-          <a:xfrm>
-            <a:off x="7772400" y="4590288"/>
-            <a:ext cx="969264" cy="475488"/>
-          </a:xfrm>
-          <a:prstGeom prst="roundRect">
-            <a:avLst>
-              <a:gd name="adj" fmla="val 11538"/>
-            </a:avLst>
-          </a:prstGeom>
-          <a:solidFill>
-            <a:srgbClr val="FFFFFF"/>
-          </a:solidFill>
-          <a:ln/>
-          <a:effectLst>
-            <a:outerShdw sx="100000" sy="100000" kx="0" ky="0" algn="bl" rotWithShape="0" blurRad="101600" dist="38100" dir="5400000">
-              <a:srgbClr val="000000">
-                <a:alpha val="35000"/>
-              </a:srgbClr>
-            </a:outerShdw>
-          </a:effectLst>
-        </p:spPr>
-      </p:sp>
       <p:pic>
         <p:nvPicPr>
-          <p:cNvPr id="10" name="Image 1" descr="/Users/pop7/Library/CloudStorage/OneDrive-MonsterConnectCo.,Ltd/Lecture/KOSEN69 - software-security/slides/pptx/assets/logo-small.png">    </p:cNvPr>
+          <p:cNvPr id="9" name="Image 1" descr="/Users/pop7/Library/CloudStorage/OneDrive-MonsterConnectCo.,Ltd/Lecture/KOSEN69 - software-security/slides/pptx/assets/logo-small.png">    </p:cNvPr>
           <p:cNvPicPr>
             <a:picLocks noChangeAspect="1"/>
           </p:cNvPicPr>
@@ -7504,7 +7069,7 @@
         </p:blipFill>
         <p:spPr>
           <a:xfrm>
-            <a:off x="7872984" y="4681728"/>
+            <a:off x="7882128" y="4700016"/>
             <a:ext cx="768096" cy="356616"/>
           </a:xfrm>
           <a:prstGeom prst="rect">

--- a/slides/pptx/week15.pptx
+++ b/slides/pptx/week15.pptx
@@ -516,7 +516,7 @@
           <a:p>
             <a:r>
               <a:rPr lang="en-US" dirty="0"/>
-              <a:t/>
+              <a:t>Final teaching week. Hook: everything we've learned — SAST, SCA, secrets, image scans — only works if it runs automatically on every commit. Today we wire it into one pipeline that blocks bad code. ~2 min.</a:t>
             </a:r>
             <a:endParaRPr lang="en-US" dirty="0"/>
           </a:p>
@@ -604,7 +604,7 @@
           <a:p>
             <a:r>
               <a:rPr lang="en-US" dirty="0"/>
-              <a:t/>
+              <a:t>A design principle that recurs: when something breaks, DENY (fail closed), don't accidentally grant access (fail open). Verbose errors leak schema/secrets (recall W4 error-based enumeration). ~3 min.</a:t>
             </a:r>
             <a:endParaRPr lang="en-US" dirty="0"/>
           </a:p>
@@ -692,7 +692,7 @@
           <a:p>
             <a:r>
               <a:rPr lang="en-US" dirty="0"/>
-              <a:t/>
+              <a:t>The professional/ethical close: finding a bug is step one; managing it to a fix (with SLAs) is the job. Coordinated disclosure + security.txt = how to receive reports responsibly. Connects to the course ethics theme. ~3 min.</a:t>
             </a:r>
             <a:endParaRPr lang="en-US" dirty="0"/>
           </a:p>
@@ -780,7 +780,7 @@
           <a:p>
             <a:r>
               <a:rPr lang="en-US" dirty="0"/>
-              <a:t/>
+              <a:t>The capstone game. Both roles teach: Blue learns to configure gates, Red learns where gates have blind spots. Run it as live PRs against the pipeline. Weekly quiz Q6 asks for one gate they added + what it blocks. ~3 min.</a:t>
             </a:r>
             <a:endParaRPr lang="en-US" dirty="0"/>
           </a:p>
@@ -868,7 +868,7 @@
           <a:p>
             <a:r>
               <a:rPr lang="en-US" dirty="0"/>
-              <a:t/>
+              <a:t>The "build failing" screenshot is the proof the gate actually blocks — a green pipeline that never fails is useless. AI-resilient tasks count. This is also the last weekly quiz.</a:t>
             </a:r>
             <a:endParaRPr lang="en-US" dirty="0"/>
           </a:p>
@@ -956,7 +956,7 @@
           <a:p>
             <a:r>
               <a:rPr lang="en-US" dirty="0"/>
-              <a:t/>
+              <a:t>Recap + course wrap of the technical units. Cold-call: "why must the gate FAIL the build, not just warn?" (warnings get ignored). ~2 min.</a:t>
             </a:r>
             <a:endParaRPr lang="en-US" dirty="0"/>
           </a:p>
@@ -1044,7 +1044,7 @@
           <a:p>
             <a:r>
               <a:rPr lang="en-US" dirty="0"/>
-              <a:t/>
+              <a:t>Wrap: "Teaching is done — next is your capstone: ship something secure, then defend it in the final CTF. Bring your project to the studio."</a:t>
             </a:r>
             <a:endParaRPr lang="en-US" dirty="0"/>
           </a:p>
@@ -1132,7 +1132,7 @@
           <a:p>
             <a:r>
               <a:rPr lang="en-US" dirty="0"/>
-              <a:t/>
+              <a:t>Roadmap, 1 min. This week ties the whole course together. Lab is the capstone of the technical units: build the gate (Blue) vs sneak past it (Red).</a:t>
             </a:r>
             <a:endParaRPr lang="en-US" dirty="0"/>
           </a:p>
@@ -1220,7 +1220,7 @@
           <a:p>
             <a:r>
               <a:rPr lang="en-US" dirty="0"/>
-              <a:t/>
+              <a:t>The synthesis slide — walk back through the term: every tool we used by hand now runs automatically on every PR. Manual scanning doesn't scale and humans forget; pipelines don't. ~4 min.</a:t>
             </a:r>
             <a:endParaRPr lang="en-US" dirty="0"/>
           </a:p>
@@ -1308,7 +1308,7 @@
           <a:p>
             <a:r>
               <a:rPr lang="en-US" dirty="0"/>
-              <a:t/>
+              <a:t>The worked example — this is the lab's actual pipeline. Three scanners, each catching a class we studied. The KEY line is "fail build on HIGH/CRITICAL": a gate that only warns gets ignored. SARIF feeds findings into the Security tab. ~6 min.</a:t>
             </a:r>
             <a:endParaRPr lang="en-US" dirty="0"/>
           </a:p>
@@ -1396,7 +1396,7 @@
           <a:p>
             <a:r>
               <a:rPr lang="en-US" dirty="0"/>
-              <a:t/>
+              <a:t>The managed equivalent they'll meet in industry. Same concept, less YAML to maintain. Mention SonarQube as the common quality-gate they'll see in internships. ~3 min.</a:t>
             </a:r>
             <a:endParaRPr lang="en-US" dirty="0"/>
           </a:p>
@@ -1484,7 +1484,7 @@
           <a:p>
             <a:r>
               <a:rPr lang="en-US" dirty="0"/>
-              <a:t/>
+              <a:t>Shift from prevention to detection. A09 (logging/monitoring failures) is a Top 10 risk because you can't respond to what you can't see. Recall W6: we read attacker actions FROM logs — but only if they were logged. ~4 min.</a:t>
             </a:r>
             <a:endParaRPr lang="en-US" dirty="0"/>
           </a:p>
@@ -1572,7 +1572,7 @@
           <a:p>
             <a:r>
               <a:rPr lang="en-US" dirty="0"/>
-              <a:t/>
+              <a:t>Awareness of the defender's toolkit. NIDS watches the wire, HIDS watches the host, SIEM correlates everything. TAP vs SPAN is a practical gotcha: SPAN ports drop packets under load — you miss attacks. Keep brisk. ~3 min.</a:t>
             </a:r>
             <a:endParaRPr lang="en-US" dirty="0"/>
           </a:p>
@@ -1660,7 +1660,7 @@
           <a:p>
             <a:r>
               <a:rPr lang="en-US" dirty="0"/>
-              <a:t/>
+              <a:t>Ties back to W2 triage. The danger asymmetry: a false negative = an attack you never saw. But too many false positives → alert fatigue → analysts mute everything → effective false negatives. The skill is TUNING. ~4 min.</a:t>
             </a:r>
             <a:endParaRPr lang="en-US" dirty="0"/>
           </a:p>
@@ -1748,7 +1748,7 @@
           <a:p>
             <a:r>
               <a:rPr lang="en-US" dirty="0"/>
-              <a:t/>
+              <a:t>A taste of incident response / forensics. Order of volatility: capture RAM before you pull the plug — it's gone on shutdown. 4625 (failed) / 4624 (success) are the login events they'd grep in a real investigation. ~4 min.</a:t>
             </a:r>
             <a:endParaRPr lang="en-US" dirty="0"/>
           </a:p>
@@ -3293,11 +3293,11 @@
         <p:spPr>
           <a:xfrm>
             <a:off x="457200" y="1325880"/>
-            <a:ext cx="8229600" cy="896112"/>
+            <a:ext cx="8229600" cy="1207008"/>
           </a:xfrm>
           <a:prstGeom prst="roundRect">
             <a:avLst>
-              <a:gd name="adj" fmla="val 8163"/>
+              <a:gd name="adj" fmla="val 6061"/>
             </a:avLst>
           </a:prstGeom>
           <a:solidFill>
@@ -3322,7 +3322,7 @@
         <p:spPr>
           <a:xfrm>
             <a:off x="731520" y="1435608"/>
-            <a:ext cx="7680960" cy="676656"/>
+            <a:ext cx="7680960" cy="987552"/>
           </a:xfrm>
           <a:prstGeom prst="rect">
             <a:avLst/>
@@ -3372,6 +3372,27 @@
                 <a:cs typeface="Calibri" pitchFamily="34" charset="-120"/>
               </a:rPr>
               <a:t>Screenshot: build failing on an injected vulnerable dependency</a:t>
+            </a:r>
+            <a:endParaRPr lang="en-US" sz="1400" dirty="0"/>
+          </a:p>
+          <a:p>
+            <a:pPr marL="342900" indent="-342900">
+              <a:spcAft>
+                <a:spcPts val="600"/>
+              </a:spcAft>
+              <a:buSzPct val="100000"/>
+              <a:buChar char="•"/>
+            </a:pPr>
+            <a:r>
+              <a:rPr lang="en-US" sz="1400" dirty="0">
+                <a:solidFill>
+                  <a:srgbClr val="1F2937"/>
+                </a:solidFill>
+                <a:latin typeface="Calibri" pitchFamily="34" charset="0"/>
+                <a:ea typeface="Calibri" pitchFamily="34" charset="-122"/>
+                <a:cs typeface="Calibri" pitchFamily="34" charset="-120"/>
+              </a:rPr>
+              <a:t>+ Audit the AI / EiPE / Prompt Problem (see worksheet)</a:t>
             </a:r>
             <a:endParaRPr lang="en-US" sz="1400" dirty="0"/>
           </a:p>

--- a/slides/pptx/week15.pptx
+++ b/slides/pptx/week15.pptx
@@ -3293,6 +3293,67 @@
         <p:spPr>
           <a:xfrm>
             <a:off x="457200" y="1325880"/>
+            <a:ext cx="8229600" cy="822960"/>
+          </a:xfrm>
+          <a:prstGeom prst="roundRect">
+            <a:avLst>
+              <a:gd name="adj" fmla="val 8889"/>
+            </a:avLst>
+          </a:prstGeom>
+          <a:solidFill>
+            <a:srgbClr val="E8EDF3"/>
+          </a:solidFill>
+          <a:ln/>
+        </p:spPr>
+      </p:sp>
+      <p:sp>
+        <p:nvSpPr>
+          <p:cNvPr id="6" name="Text 3"/>
+          <p:cNvSpPr/>
+          <p:nvPr/>
+        </p:nvSpPr>
+        <p:spPr>
+          <a:xfrm>
+            <a:off x="731520" y="1325880"/>
+            <a:ext cx="7680960" cy="822960"/>
+          </a:xfrm>
+          <a:prstGeom prst="rect">
+            <a:avLst/>
+          </a:prstGeom>
+          <a:noFill/>
+          <a:ln/>
+        </p:spPr>
+        <p:txBody>
+          <a:bodyPr wrap="square" lIns="0" tIns="0" rIns="0" bIns="0" rtlCol="0" anchor="ctr"/>
+          <a:lstStyle/>
+          <a:p>
+            <a:pPr indent="0" marL="0">
+              <a:buNone/>
+            </a:pPr>
+            <a:r>
+              <a:rPr lang="en-US" sz="1400" i="1" dirty="0">
+                <a:solidFill>
+                  <a:srgbClr val="E35205"/>
+                </a:solidFill>
+                <a:latin typeface="Calibri" pitchFamily="34" charset="0"/>
+                <a:ea typeface="Calibri" pitchFamily="34" charset="-122"/>
+                <a:cs typeface="Calibri" pitchFamily="34" charset="-120"/>
+              </a:rPr>
+              <a:t>📋 Worksheet 15 — labs/week15-devsecops-pipeline/worksheet.md (Part 3) · kickoff: push security-ci.yml → GitHub Actions (· python sample-service.py)</a:t>
+            </a:r>
+            <a:endParaRPr lang="en-US" sz="1400" dirty="0"/>
+          </a:p>
+        </p:txBody>
+      </p:sp>
+      <p:sp>
+        <p:nvSpPr>
+          <p:cNvPr id="7" name="Shape 4"/>
+          <p:cNvSpPr/>
+          <p:nvPr/>
+        </p:nvSpPr>
+        <p:spPr>
+          <a:xfrm>
+            <a:off x="457200" y="2313432"/>
             <a:ext cx="8229600" cy="1207008"/>
           </a:xfrm>
           <a:prstGeom prst="roundRect">
@@ -3315,13 +3376,13 @@
       </p:sp>
       <p:sp>
         <p:nvSpPr>
-          <p:cNvPr id="6" name="Text 3"/>
-          <p:cNvSpPr/>
-          <p:nvPr/>
-        </p:nvSpPr>
-        <p:spPr>
-          <a:xfrm>
-            <a:off x="731520" y="1435608"/>
+          <p:cNvPr id="8" name="Text 5"/>
+          <p:cNvSpPr/>
+          <p:nvPr/>
+        </p:nvSpPr>
+        <p:spPr>
+          <a:xfrm>
+            <a:off x="731520" y="2423160"/>
             <a:ext cx="7680960" cy="987552"/>
           </a:xfrm>
           <a:prstGeom prst="rect">
@@ -3400,7 +3461,7 @@
       </p:sp>
       <p:sp>
         <p:nvSpPr>
-          <p:cNvPr id="7" name="Text 4"/>
+          <p:cNvPr id="9" name="Text 6"/>
           <p:cNvSpPr/>
           <p:nvPr/>
         </p:nvSpPr>
@@ -3439,7 +3500,7 @@
       </p:sp>
       <p:pic>
         <p:nvPicPr>
-          <p:cNvPr id="8" name="Image 1" descr="/Users/pop7/Library/CloudStorage/OneDrive-MonsterConnectCo.,Ltd/Lecture/KOSEN69 - software-security/slides/pptx/assets/logo-small.png">    </p:cNvPr>
+          <p:cNvPr id="10" name="Image 1" descr="/Users/pop7/Library/CloudStorage/OneDrive-MonsterConnectCo.,Ltd/Lecture/KOSEN69 - software-security/slides/pptx/assets/logo-small.png">    </p:cNvPr>
           <p:cNvPicPr>
             <a:picLocks noChangeAspect="1"/>
           </p:cNvPicPr>
